--- a/week5/week5_chap7_python_first_steps.pptx
+++ b/week5/week5_chap7_python_first_steps.pptx
@@ -5,7 +5,7 @@
     <p:sldMasterId id="2147483648" r:id="rId1"/>
   </p:sldMasterIdLst>
   <p:notesMasterIdLst>
-    <p:notesMasterId r:id="rId27"/>
+    <p:notesMasterId r:id="rId28"/>
   </p:notesMasterIdLst>
   <p:sldIdLst>
     <p:sldId id="256" r:id="rId2"/>
@@ -18,21 +18,22 @@
     <p:sldId id="310" r:id="rId9"/>
     <p:sldId id="321" r:id="rId10"/>
     <p:sldId id="268" r:id="rId11"/>
-    <p:sldId id="311" r:id="rId12"/>
-    <p:sldId id="312" r:id="rId13"/>
-    <p:sldId id="313" r:id="rId14"/>
-    <p:sldId id="314" r:id="rId15"/>
-    <p:sldId id="315" r:id="rId16"/>
-    <p:sldId id="322" r:id="rId17"/>
-    <p:sldId id="317" r:id="rId18"/>
-    <p:sldId id="323" r:id="rId19"/>
-    <p:sldId id="324" r:id="rId20"/>
-    <p:sldId id="325" r:id="rId21"/>
-    <p:sldId id="318" r:id="rId22"/>
-    <p:sldId id="320" r:id="rId23"/>
-    <p:sldId id="326" r:id="rId24"/>
-    <p:sldId id="319" r:id="rId25"/>
-    <p:sldId id="327" r:id="rId26"/>
+    <p:sldId id="330" r:id="rId12"/>
+    <p:sldId id="311" r:id="rId13"/>
+    <p:sldId id="312" r:id="rId14"/>
+    <p:sldId id="313" r:id="rId15"/>
+    <p:sldId id="314" r:id="rId16"/>
+    <p:sldId id="315" r:id="rId17"/>
+    <p:sldId id="322" r:id="rId18"/>
+    <p:sldId id="317" r:id="rId19"/>
+    <p:sldId id="323" r:id="rId20"/>
+    <p:sldId id="324" r:id="rId21"/>
+    <p:sldId id="325" r:id="rId22"/>
+    <p:sldId id="318" r:id="rId23"/>
+    <p:sldId id="320" r:id="rId24"/>
+    <p:sldId id="326" r:id="rId25"/>
+    <p:sldId id="319" r:id="rId26"/>
+    <p:sldId id="327" r:id="rId27"/>
   </p:sldIdLst>
   <p:sldSz cx="12192000" cy="6858000"/>
   <p:notesSz cx="6858000" cy="9144000"/>
@@ -221,7 +222,7 @@
           <a:p>
             <a:fld id="{A87CAA56-48F1-B647-9950-02C2DC558F35}" type="datetimeFigureOut">
               <a:rPr lang="en-US" smtClean="0"/>
-              <a:t>9/22/24</a:t>
+              <a:t>9/22/25</a:t>
             </a:fld>
             <a:endParaRPr lang="en-US"/>
           </a:p>
@@ -637,7 +638,7 @@
           <a:p>
             <a:fld id="{FBC3CC19-939B-124D-AEB5-0A0C0D7EEB85}" type="slidenum">
               <a:rPr lang="en-US" smtClean="0"/>
-              <a:t>16</a:t>
+              <a:t>17</a:t>
             </a:fld>
             <a:endParaRPr lang="en-US"/>
           </a:p>
@@ -721,7 +722,7 @@
           <a:p>
             <a:fld id="{FBC3CC19-939B-124D-AEB5-0A0C0D7EEB85}" type="slidenum">
               <a:rPr lang="en-US" smtClean="0"/>
-              <a:t>17</a:t>
+              <a:t>18</a:t>
             </a:fld>
             <a:endParaRPr lang="en-US"/>
           </a:p>
@@ -805,7 +806,7 @@
           <a:p>
             <a:fld id="{FBC3CC19-939B-124D-AEB5-0A0C0D7EEB85}" type="slidenum">
               <a:rPr lang="en-US" smtClean="0"/>
-              <a:t>18</a:t>
+              <a:t>19</a:t>
             </a:fld>
             <a:endParaRPr lang="en-US"/>
           </a:p>
@@ -889,7 +890,7 @@
           <a:p>
             <a:fld id="{FBC3CC19-939B-124D-AEB5-0A0C0D7EEB85}" type="slidenum">
               <a:rPr lang="en-US" smtClean="0"/>
-              <a:t>21</a:t>
+              <a:t>22</a:t>
             </a:fld>
             <a:endParaRPr lang="en-US"/>
           </a:p>
@@ -973,7 +974,7 @@
           <a:p>
             <a:fld id="{FBC3CC19-939B-124D-AEB5-0A0C0D7EEB85}" type="slidenum">
               <a:rPr lang="en-US" smtClean="0"/>
-              <a:t>22</a:t>
+              <a:t>23</a:t>
             </a:fld>
             <a:endParaRPr lang="en-US"/>
           </a:p>
@@ -1057,7 +1058,7 @@
           <a:p>
             <a:fld id="{FBC3CC19-939B-124D-AEB5-0A0C0D7EEB85}" type="slidenum">
               <a:rPr lang="en-US" smtClean="0"/>
-              <a:t>24</a:t>
+              <a:t>25</a:t>
             </a:fld>
             <a:endParaRPr lang="en-US"/>
           </a:p>
@@ -1393,7 +1394,7 @@
           <a:p>
             <a:fld id="{FBC3CC19-939B-124D-AEB5-0A0C0D7EEB85}" type="slidenum">
               <a:rPr lang="en-US" smtClean="0"/>
-              <a:t>11</a:t>
+              <a:t>12</a:t>
             </a:fld>
             <a:endParaRPr lang="en-US"/>
           </a:p>
@@ -1477,7 +1478,7 @@
           <a:p>
             <a:fld id="{FBC3CC19-939B-124D-AEB5-0A0C0D7EEB85}" type="slidenum">
               <a:rPr lang="en-US" smtClean="0"/>
-              <a:t>12</a:t>
+              <a:t>13</a:t>
             </a:fld>
             <a:endParaRPr lang="en-US"/>
           </a:p>
@@ -1561,7 +1562,7 @@
           <a:p>
             <a:fld id="{FBC3CC19-939B-124D-AEB5-0A0C0D7EEB85}" type="slidenum">
               <a:rPr lang="en-US" smtClean="0"/>
-              <a:t>13</a:t>
+              <a:t>14</a:t>
             </a:fld>
             <a:endParaRPr lang="en-US"/>
           </a:p>
@@ -1645,7 +1646,7 @@
           <a:p>
             <a:fld id="{FBC3CC19-939B-124D-AEB5-0A0C0D7EEB85}" type="slidenum">
               <a:rPr lang="en-US" smtClean="0"/>
-              <a:t>14</a:t>
+              <a:t>15</a:t>
             </a:fld>
             <a:endParaRPr lang="en-US"/>
           </a:p>
@@ -1729,7 +1730,7 @@
           <a:p>
             <a:fld id="{FBC3CC19-939B-124D-AEB5-0A0C0D7EEB85}" type="slidenum">
               <a:rPr lang="en-US" smtClean="0"/>
-              <a:t>15</a:t>
+              <a:t>16</a:t>
             </a:fld>
             <a:endParaRPr lang="en-US"/>
           </a:p>
@@ -1895,7 +1896,7 @@
           <a:p>
             <a:fld id="{4D28CA04-A7BE-9F4B-927B-7FC1C38147BF}" type="datetimeFigureOut">
               <a:rPr lang="en-US" smtClean="0"/>
-              <a:t>9/22/24</a:t>
+              <a:t>9/22/25</a:t>
             </a:fld>
             <a:endParaRPr lang="en-US"/>
           </a:p>
@@ -2093,7 +2094,7 @@
           <a:p>
             <a:fld id="{4D28CA04-A7BE-9F4B-927B-7FC1C38147BF}" type="datetimeFigureOut">
               <a:rPr lang="en-US" smtClean="0"/>
-              <a:t>9/22/24</a:t>
+              <a:t>9/22/25</a:t>
             </a:fld>
             <a:endParaRPr lang="en-US"/>
           </a:p>
@@ -2301,7 +2302,7 @@
           <a:p>
             <a:fld id="{4D28CA04-A7BE-9F4B-927B-7FC1C38147BF}" type="datetimeFigureOut">
               <a:rPr lang="en-US" smtClean="0"/>
-              <a:t>9/22/24</a:t>
+              <a:t>9/22/25</a:t>
             </a:fld>
             <a:endParaRPr lang="en-US"/>
           </a:p>
@@ -2499,7 +2500,7 @@
           <a:p>
             <a:fld id="{4D28CA04-A7BE-9F4B-927B-7FC1C38147BF}" type="datetimeFigureOut">
               <a:rPr lang="en-US" smtClean="0"/>
-              <a:t>9/22/24</a:t>
+              <a:t>9/22/25</a:t>
             </a:fld>
             <a:endParaRPr lang="en-US"/>
           </a:p>
@@ -2774,7 +2775,7 @@
           <a:p>
             <a:fld id="{4D28CA04-A7BE-9F4B-927B-7FC1C38147BF}" type="datetimeFigureOut">
               <a:rPr lang="en-US" smtClean="0"/>
-              <a:t>9/22/24</a:t>
+              <a:t>9/22/25</a:t>
             </a:fld>
             <a:endParaRPr lang="en-US"/>
           </a:p>
@@ -3039,7 +3040,7 @@
           <a:p>
             <a:fld id="{4D28CA04-A7BE-9F4B-927B-7FC1C38147BF}" type="datetimeFigureOut">
               <a:rPr lang="en-US" smtClean="0"/>
-              <a:t>9/22/24</a:t>
+              <a:t>9/22/25</a:t>
             </a:fld>
             <a:endParaRPr lang="en-US"/>
           </a:p>
@@ -3451,7 +3452,7 @@
           <a:p>
             <a:fld id="{4D28CA04-A7BE-9F4B-927B-7FC1C38147BF}" type="datetimeFigureOut">
               <a:rPr lang="en-US" smtClean="0"/>
-              <a:t>9/22/24</a:t>
+              <a:t>9/22/25</a:t>
             </a:fld>
             <a:endParaRPr lang="en-US"/>
           </a:p>
@@ -3592,7 +3593,7 @@
           <a:p>
             <a:fld id="{4D28CA04-A7BE-9F4B-927B-7FC1C38147BF}" type="datetimeFigureOut">
               <a:rPr lang="en-US" smtClean="0"/>
-              <a:t>9/22/24</a:t>
+              <a:t>9/22/25</a:t>
             </a:fld>
             <a:endParaRPr lang="en-US"/>
           </a:p>
@@ -3705,7 +3706,7 @@
           <a:p>
             <a:fld id="{4D28CA04-A7BE-9F4B-927B-7FC1C38147BF}" type="datetimeFigureOut">
               <a:rPr lang="en-US" smtClean="0"/>
-              <a:t>9/22/24</a:t>
+              <a:t>9/22/25</a:t>
             </a:fld>
             <a:endParaRPr lang="en-US"/>
           </a:p>
@@ -4016,7 +4017,7 @@
           <a:p>
             <a:fld id="{4D28CA04-A7BE-9F4B-927B-7FC1C38147BF}" type="datetimeFigureOut">
               <a:rPr lang="en-US" smtClean="0"/>
-              <a:t>9/22/24</a:t>
+              <a:t>9/22/25</a:t>
             </a:fld>
             <a:endParaRPr lang="en-US"/>
           </a:p>
@@ -4304,7 +4305,7 @@
           <a:p>
             <a:fld id="{4D28CA04-A7BE-9F4B-927B-7FC1C38147BF}" type="datetimeFigureOut">
               <a:rPr lang="en-US" smtClean="0"/>
-              <a:t>9/22/24</a:t>
+              <a:t>9/22/25</a:t>
             </a:fld>
             <a:endParaRPr lang="en-US"/>
           </a:p>
@@ -4545,7 +4546,7 @@
           <a:p>
             <a:fld id="{4D28CA04-A7BE-9F4B-927B-7FC1C38147BF}" type="datetimeFigureOut">
               <a:rPr lang="en-US" smtClean="0"/>
-              <a:t>9/22/24</a:t>
+              <a:t>9/22/25</a:t>
             </a:fld>
             <a:endParaRPr lang="en-US"/>
           </a:p>
@@ -5296,7 +5297,7 @@
               <a:rPr lang="en-US" sz="2600" dirty="0">
                 <a:latin typeface="Helvetica Light" panose="020B0403020202020204" pitchFamily="34" charset="0"/>
               </a:rPr>
-              <a:t>2. How will you control input and output? And What variables to you want to make/use?</a:t>
+              <a:t>2. How will you control input and output? And what variables do you want to make/use?</a:t>
             </a:r>
           </a:p>
         </p:txBody>
@@ -5405,10 +5406,198 @@
       </p:grpSpPr>
       <p:sp>
         <p:nvSpPr>
-          <p:cNvPr id="2" name="TextBox 1">
-            <a:extLst>
-              <a:ext uri="{FF2B5EF4-FFF2-40B4-BE49-F238E27FC236}">
-                <a16:creationId xmlns:a16="http://schemas.microsoft.com/office/drawing/2014/main" id="{E804718F-31B7-6F43-A50D-E9F3D3CD5D4F}"/>
+          <p:cNvPr id="2" name="Title 1">
+            <a:extLst>
+              <a:ext uri="{FF2B5EF4-FFF2-40B4-BE49-F238E27FC236}">
+                <a16:creationId xmlns:a16="http://schemas.microsoft.com/office/drawing/2014/main" id="{19C44A8D-B5E2-EF53-1FEF-9A0372D14408}"/>
+              </a:ext>
+            </a:extLst>
+          </p:cNvPr>
+          <p:cNvSpPr txBox="1">
+            <a:spLocks/>
+          </p:cNvSpPr>
+          <p:nvPr/>
+        </p:nvSpPr>
+        <p:spPr>
+          <a:xfrm>
+            <a:off x="838200" y="365125"/>
+            <a:ext cx="10515600" cy="1325563"/>
+          </a:xfrm>
+          <a:prstGeom prst="rect">
+            <a:avLst/>
+          </a:prstGeom>
+        </p:spPr>
+        <p:txBody>
+          <a:bodyPr>
+            <a:normAutofit fontScale="92500"/>
+          </a:bodyPr>
+          <a:lstStyle>
+            <a:lvl1pPr algn="l" defTabSz="914400" rtl="0" eaLnBrk="1" latinLnBrk="0" hangingPunct="1">
+              <a:lnSpc>
+                <a:spcPct val="90000"/>
+              </a:lnSpc>
+              <a:spcBef>
+                <a:spcPct val="0"/>
+              </a:spcBef>
+              <a:buNone/>
+              <a:defRPr sz="4400" kern="1200">
+                <a:solidFill>
+                  <a:schemeClr val="tx1"/>
+                </a:solidFill>
+                <a:latin typeface="+mj-lt"/>
+                <a:ea typeface="+mj-ea"/>
+                <a:cs typeface="+mj-cs"/>
+              </a:defRPr>
+            </a:lvl1pPr>
+          </a:lstStyle>
+          <a:p>
+            <a:pPr algn="ctr"/>
+            <a:r>
+              <a:rPr lang="en-US" sz="3900" b="1" dirty="0" err="1">
+                <a:latin typeface="Helvetica Light" panose="020B0403020202020204" pitchFamily="34" charset="0"/>
+              </a:rPr>
+              <a:t>Psuedocode</a:t>
+            </a:r>
+            <a:r>
+              <a:rPr lang="en-US" sz="3900" b="1" dirty="0">
+                <a:latin typeface="Helvetica Light" panose="020B0403020202020204" pitchFamily="34" charset="0"/>
+              </a:rPr>
+              <a:t>: </a:t>
+            </a:r>
+          </a:p>
+          <a:p>
+            <a:r>
+              <a:rPr lang="en-US" sz="3300" dirty="0">
+                <a:latin typeface="Helvetica Light" panose="020B0403020202020204" pitchFamily="34" charset="0"/>
+              </a:rPr>
+              <a:t>thinking and mapping out what you need you code to do</a:t>
+            </a:r>
+          </a:p>
+        </p:txBody>
+      </p:sp>
+      <p:sp>
+        <p:nvSpPr>
+          <p:cNvPr id="3" name="Rectangle 2">
+            <a:extLst>
+              <a:ext uri="{FF2B5EF4-FFF2-40B4-BE49-F238E27FC236}">
+                <a16:creationId xmlns:a16="http://schemas.microsoft.com/office/drawing/2014/main" id="{BF8965F7-7A2F-0E62-F4F6-2BBF92832F18}"/>
+              </a:ext>
+            </a:extLst>
+          </p:cNvPr>
+          <p:cNvSpPr/>
+          <p:nvPr/>
+        </p:nvSpPr>
+        <p:spPr>
+          <a:xfrm>
+            <a:off x="860432" y="1944290"/>
+            <a:ext cx="10471136" cy="492443"/>
+          </a:xfrm>
+          <a:prstGeom prst="rect">
+            <a:avLst/>
+          </a:prstGeom>
+        </p:spPr>
+        <p:txBody>
+          <a:bodyPr wrap="none">
+            <a:spAutoFit/>
+          </a:bodyPr>
+          <a:lstStyle/>
+          <a:p>
+            <a:r>
+              <a:rPr lang="en-US" sz="2600" dirty="0">
+                <a:latin typeface="Helvetica Light" panose="020B0403020202020204" pitchFamily="34" charset="0"/>
+              </a:rPr>
+              <a:t>A plain language outline of the goal, and the logic of how to solve it</a:t>
+            </a:r>
+          </a:p>
+        </p:txBody>
+      </p:sp>
+      <p:sp>
+        <p:nvSpPr>
+          <p:cNvPr id="4" name="Rectangle 3">
+            <a:extLst>
+              <a:ext uri="{FF2B5EF4-FFF2-40B4-BE49-F238E27FC236}">
+                <a16:creationId xmlns:a16="http://schemas.microsoft.com/office/drawing/2014/main" id="{C87E6672-9B62-179D-45BC-62824BFF1E30}"/>
+              </a:ext>
+            </a:extLst>
+          </p:cNvPr>
+          <p:cNvSpPr/>
+          <p:nvPr/>
+        </p:nvSpPr>
+        <p:spPr>
+          <a:xfrm>
+            <a:off x="838200" y="2930531"/>
+            <a:ext cx="11154103" cy="2492990"/>
+          </a:xfrm>
+          <a:prstGeom prst="rect">
+            <a:avLst/>
+          </a:prstGeom>
+        </p:spPr>
+        <p:txBody>
+          <a:bodyPr wrap="square">
+            <a:spAutoFit/>
+          </a:bodyPr>
+          <a:lstStyle/>
+          <a:p>
+            <a:r>
+              <a:rPr lang="en-US" sz="2600" dirty="0">
+                <a:latin typeface="Helvetica Light" panose="020B0403020202020204" pitchFamily="34" charset="0"/>
+              </a:rPr>
+              <a:t>Why? </a:t>
+            </a:r>
+          </a:p>
+          <a:p>
+            <a:pPr marL="457200" indent="-457200">
+              <a:buFontTx/>
+              <a:buChar char="-"/>
+            </a:pPr>
+            <a:r>
+              <a:rPr lang="en-US" sz="2600" dirty="0">
+                <a:latin typeface="Helvetica Light" panose="020B0403020202020204" pitchFamily="34" charset="0"/>
+              </a:rPr>
+              <a:t>Clarifies your thinking before getting bogged down in syntax details</a:t>
+            </a:r>
+          </a:p>
+          <a:p>
+            <a:pPr marL="457200" indent="-457200">
+              <a:buFontTx/>
+              <a:buChar char="-"/>
+            </a:pPr>
+            <a:r>
+              <a:rPr lang="en-US" sz="2600" dirty="0">
+                <a:latin typeface="Helvetica Light" panose="020B0403020202020204" pitchFamily="34" charset="0"/>
+              </a:rPr>
+              <a:t>Breaks big problems into more achievable chunks</a:t>
+            </a:r>
+          </a:p>
+          <a:p>
+            <a:pPr marL="457200" indent="-457200">
+              <a:buFontTx/>
+              <a:buChar char="-"/>
+            </a:pPr>
+            <a:r>
+              <a:rPr lang="en-US" sz="2600" dirty="0">
+                <a:latin typeface="Helvetica Light" panose="020B0403020202020204" pitchFamily="34" charset="0"/>
+              </a:rPr>
+              <a:t>Especially valuable for conceiving loops and functions in more complex problems</a:t>
+            </a:r>
+          </a:p>
+          <a:p>
+            <a:pPr marL="457200" indent="-457200">
+              <a:buFontTx/>
+              <a:buChar char="-"/>
+            </a:pPr>
+            <a:endParaRPr lang="en-US" sz="2600" dirty="0">
+              <a:latin typeface="Helvetica Light" panose="020B0403020202020204" pitchFamily="34" charset="0"/>
+            </a:endParaRPr>
+          </a:p>
+        </p:txBody>
+      </p:sp>
+      <p:sp>
+        <p:nvSpPr>
+          <p:cNvPr id="6" name="TextBox 5">
+            <a:extLst>
+              <a:ext uri="{FF2B5EF4-FFF2-40B4-BE49-F238E27FC236}">
+                <a16:creationId xmlns:a16="http://schemas.microsoft.com/office/drawing/2014/main" id="{9D6005D5-BE28-90D4-E4BB-6347B48A7830}"/>
               </a:ext>
             </a:extLst>
           </p:cNvPr>
@@ -5417,8 +5606,8 @@
         </p:nvSpPr>
         <p:spPr>
           <a:xfrm>
-            <a:off x="1388439" y="560756"/>
-            <a:ext cx="4665060" cy="615553"/>
+            <a:off x="754117" y="5671097"/>
+            <a:ext cx="10859814" cy="492443"/>
           </a:xfrm>
           <a:prstGeom prst="rect">
             <a:avLst/>
@@ -5426,16 +5615,89 @@
           <a:noFill/>
         </p:spPr>
         <p:txBody>
+          <a:bodyPr wrap="square">
+            <a:spAutoFit/>
+          </a:bodyPr>
+          <a:lstStyle/>
+          <a:p>
+            <a:r>
+              <a:rPr lang="en-US" sz="2600" b="1" dirty="0">
+                <a:latin typeface="Helvetica Light" panose="020B0403020202020204" pitchFamily="34" charset="0"/>
+              </a:rPr>
+              <a:t>Don’t underestimate the value of planning</a:t>
+            </a:r>
+          </a:p>
+        </p:txBody>
+      </p:sp>
+    </p:spTree>
+    <p:extLst>
+      <p:ext uri="{BB962C8B-B14F-4D97-AF65-F5344CB8AC3E}">
+        <p14:creationId xmlns:p14="http://schemas.microsoft.com/office/powerpoint/2010/main" val="670941201"/>
+      </p:ext>
+    </p:extLst>
+  </p:cSld>
+  <p:clrMapOvr>
+    <a:masterClrMapping/>
+  </p:clrMapOvr>
+</p:sld>
+</file>
+
+<file path=ppt/slides/slide12.xml><?xml version="1.0" encoding="utf-8"?>
+<p:sld xmlns:a="http://schemas.openxmlformats.org/drawingml/2006/main" xmlns:r="http://schemas.openxmlformats.org/officeDocument/2006/relationships" xmlns:p="http://schemas.openxmlformats.org/presentationml/2006/main">
+  <p:cSld>
+    <p:spTree>
+      <p:nvGrpSpPr>
+        <p:cNvPr id="1" name=""/>
+        <p:cNvGrpSpPr/>
+        <p:nvPr/>
+      </p:nvGrpSpPr>
+      <p:grpSpPr>
+        <a:xfrm>
+          <a:off x="0" y="0"/>
+          <a:ext cx="0" cy="0"/>
+          <a:chOff x="0" y="0"/>
+          <a:chExt cx="0" cy="0"/>
+        </a:xfrm>
+      </p:grpSpPr>
+      <p:sp>
+        <p:nvSpPr>
+          <p:cNvPr id="2" name="TextBox 1">
+            <a:extLst>
+              <a:ext uri="{FF2B5EF4-FFF2-40B4-BE49-F238E27FC236}">
+                <a16:creationId xmlns:a16="http://schemas.microsoft.com/office/drawing/2014/main" id="{E804718F-31B7-6F43-A50D-E9F3D3CD5D4F}"/>
+              </a:ext>
+            </a:extLst>
+          </p:cNvPr>
+          <p:cNvSpPr txBox="1"/>
+          <p:nvPr/>
+        </p:nvSpPr>
+        <p:spPr>
+          <a:xfrm>
+            <a:off x="1388439" y="560756"/>
+            <a:ext cx="4883068" cy="615553"/>
+          </a:xfrm>
+          <a:prstGeom prst="rect">
+            <a:avLst/>
+          </a:prstGeom>
+          <a:noFill/>
+        </p:spPr>
+        <p:txBody>
           <a:bodyPr wrap="none" rtlCol="0">
             <a:spAutoFit/>
           </a:bodyPr>
           <a:lstStyle/>
           <a:p>
             <a:r>
+              <a:rPr lang="en-US" sz="3400" dirty="0" err="1">
+                <a:latin typeface="Helvetica Light" panose="020B0403020202020204" pitchFamily="34" charset="0"/>
+              </a:rPr>
+              <a:t>Vsariable</a:t>
+            </a:r>
+            <a:r>
               <a:rPr lang="en-US" sz="3400" dirty="0">
                 <a:latin typeface="Helvetica Light" panose="020B0403020202020204" pitchFamily="34" charset="0"/>
               </a:rPr>
-              <a:t>Variable types: Scalars</a:t>
+              <a:t> types: Scalars</a:t>
             </a:r>
           </a:p>
         </p:txBody>
@@ -5855,7 +6117,7 @@
 </p:sld>
 </file>
 
-<file path=ppt/slides/slide12.xml><?xml version="1.0" encoding="utf-8"?>
+<file path=ppt/slides/slide13.xml><?xml version="1.0" encoding="utf-8"?>
 <p:sld xmlns:a="http://schemas.openxmlformats.org/drawingml/2006/main" xmlns:r="http://schemas.openxmlformats.org/officeDocument/2006/relationships" xmlns:p="http://schemas.openxmlformats.org/presentationml/2006/main">
   <p:cSld>
     <p:spTree>
@@ -6359,7 +6621,7 @@
 </p:sld>
 </file>
 
-<file path=ppt/slides/slide13.xml><?xml version="1.0" encoding="utf-8"?>
+<file path=ppt/slides/slide14.xml><?xml version="1.0" encoding="utf-8"?>
 <p:sld xmlns:a="http://schemas.openxmlformats.org/drawingml/2006/main" xmlns:r="http://schemas.openxmlformats.org/officeDocument/2006/relationships" xmlns:p="http://schemas.openxmlformats.org/presentationml/2006/main">
   <p:cSld>
     <p:spTree>
@@ -6943,7 +7205,7 @@
 </p:sld>
 </file>
 
-<file path=ppt/slides/slide14.xml><?xml version="1.0" encoding="utf-8"?>
+<file path=ppt/slides/slide15.xml><?xml version="1.0" encoding="utf-8"?>
 <p:sld xmlns:a="http://schemas.openxmlformats.org/drawingml/2006/main" xmlns:r="http://schemas.openxmlformats.org/officeDocument/2006/relationships" xmlns:p="http://schemas.openxmlformats.org/presentationml/2006/main">
   <p:cSld>
     <p:spTree>
@@ -7125,7 +7387,7 @@
 </p:sld>
 </file>
 
-<file path=ppt/slides/slide15.xml><?xml version="1.0" encoding="utf-8"?>
+<file path=ppt/slides/slide16.xml><?xml version="1.0" encoding="utf-8"?>
 <p:sld xmlns:a="http://schemas.openxmlformats.org/drawingml/2006/main" xmlns:r="http://schemas.openxmlformats.org/officeDocument/2006/relationships" xmlns:p="http://schemas.openxmlformats.org/presentationml/2006/main">
   <p:cSld>
     <p:spTree>
@@ -7907,7 +8169,7 @@
 </p:sld>
 </file>
 
-<file path=ppt/slides/slide16.xml><?xml version="1.0" encoding="utf-8"?>
+<file path=ppt/slides/slide17.xml><?xml version="1.0" encoding="utf-8"?>
 <p:sld xmlns:a="http://schemas.openxmlformats.org/drawingml/2006/main" xmlns:r="http://schemas.openxmlformats.org/officeDocument/2006/relationships" xmlns:p="http://schemas.openxmlformats.org/presentationml/2006/main">
   <p:cSld>
     <p:spTree>
@@ -8839,7 +9101,7 @@
 </p:sld>
 </file>
 
-<file path=ppt/slides/slide17.xml><?xml version="1.0" encoding="utf-8"?>
+<file path=ppt/slides/slide18.xml><?xml version="1.0" encoding="utf-8"?>
 <p:sld xmlns:a="http://schemas.openxmlformats.org/drawingml/2006/main" xmlns:r="http://schemas.openxmlformats.org/officeDocument/2006/relationships" xmlns:p="http://schemas.openxmlformats.org/presentationml/2006/main">
   <p:cSld>
     <p:spTree>
@@ -9474,684 +9736,6 @@
     <p:extLst>
       <p:ext uri="{BB962C8B-B14F-4D97-AF65-F5344CB8AC3E}">
         <p14:creationId xmlns:p14="http://schemas.microsoft.com/office/powerpoint/2010/main" val="3879454082"/>
-      </p:ext>
-    </p:extLst>
-  </p:cSld>
-  <p:clrMapOvr>
-    <a:masterClrMapping/>
-  </p:clrMapOvr>
-  <p:timing>
-    <p:tnLst>
-      <p:par>
-        <p:cTn id="1" dur="indefinite" restart="never" nodeType="tmRoot">
-          <p:childTnLst>
-            <p:seq concurrent="1" nextAc="seek">
-              <p:cTn id="2" dur="indefinite" nodeType="mainSeq">
-                <p:childTnLst>
-                  <p:par>
-                    <p:cTn id="3" fill="hold">
-                      <p:stCondLst>
-                        <p:cond delay="indefinite"/>
-                      </p:stCondLst>
-                      <p:childTnLst>
-                        <p:par>
-                          <p:cTn id="4" fill="hold">
-                            <p:stCondLst>
-                              <p:cond delay="0"/>
-                            </p:stCondLst>
-                            <p:childTnLst>
-                              <p:par>
-                                <p:cTn id="5" presetID="1" presetClass="entr" presetSubtype="0" fill="hold" grpId="0" nodeType="clickEffect">
-                                  <p:stCondLst>
-                                    <p:cond delay="0"/>
-                                  </p:stCondLst>
-                                  <p:childTnLst>
-                                    <p:set>
-                                      <p:cBhvr>
-                                        <p:cTn id="6" dur="1" fill="hold">
-                                          <p:stCondLst>
-                                            <p:cond delay="0"/>
-                                          </p:stCondLst>
-                                        </p:cTn>
-                                        <p:tgtEl>
-                                          <p:spTgt spid="3"/>
-                                        </p:tgtEl>
-                                        <p:attrNameLst>
-                                          <p:attrName>style.visibility</p:attrName>
-                                        </p:attrNameLst>
-                                      </p:cBhvr>
-                                      <p:to>
-                                        <p:strVal val="visible"/>
-                                      </p:to>
-                                    </p:set>
-                                  </p:childTnLst>
-                                </p:cTn>
-                              </p:par>
-                            </p:childTnLst>
-                          </p:cTn>
-                        </p:par>
-                      </p:childTnLst>
-                    </p:cTn>
-                  </p:par>
-                </p:childTnLst>
-              </p:cTn>
-              <p:prevCondLst>
-                <p:cond evt="onPrev" delay="0">
-                  <p:tgtEl>
-                    <p:sldTgt/>
-                  </p:tgtEl>
-                </p:cond>
-              </p:prevCondLst>
-              <p:nextCondLst>
-                <p:cond evt="onNext" delay="0">
-                  <p:tgtEl>
-                    <p:sldTgt/>
-                  </p:tgtEl>
-                </p:cond>
-              </p:nextCondLst>
-            </p:seq>
-          </p:childTnLst>
-        </p:cTn>
-      </p:par>
-    </p:tnLst>
-    <p:bldLst>
-      <p:bldP spid="3" grpId="0"/>
-    </p:bldLst>
-  </p:timing>
-</p:sld>
-</file>
-
-<file path=ppt/slides/slide18.xml><?xml version="1.0" encoding="utf-8"?>
-<p:sld xmlns:a="http://schemas.openxmlformats.org/drawingml/2006/main" xmlns:r="http://schemas.openxmlformats.org/officeDocument/2006/relationships" xmlns:p="http://schemas.openxmlformats.org/presentationml/2006/main">
-  <p:cSld>
-    <p:spTree>
-      <p:nvGrpSpPr>
-        <p:cNvPr id="1" name=""/>
-        <p:cNvGrpSpPr/>
-        <p:nvPr/>
-      </p:nvGrpSpPr>
-      <p:grpSpPr>
-        <a:xfrm>
-          <a:off x="0" y="0"/>
-          <a:ext cx="0" cy="0"/>
-          <a:chOff x="0" y="0"/>
-          <a:chExt cx="0" cy="0"/>
-        </a:xfrm>
-      </p:grpSpPr>
-      <p:sp>
-        <p:nvSpPr>
-          <p:cNvPr id="2" name="TextBox 1">
-            <a:extLst>
-              <a:ext uri="{FF2B5EF4-FFF2-40B4-BE49-F238E27FC236}">
-                <a16:creationId xmlns:a16="http://schemas.microsoft.com/office/drawing/2014/main" id="{BBAC2BDB-BA0E-3941-961A-D3A5A5D22E7D}"/>
-              </a:ext>
-            </a:extLst>
-          </p:cNvPr>
-          <p:cNvSpPr txBox="1"/>
-          <p:nvPr/>
-        </p:nvSpPr>
-        <p:spPr>
-          <a:xfrm>
-            <a:off x="6976210" y="2150205"/>
-            <a:ext cx="2989921" cy="1292662"/>
-          </a:xfrm>
-          <a:prstGeom prst="rect">
-            <a:avLst/>
-          </a:prstGeom>
-          <a:noFill/>
-          <a:ln w="12700">
-            <a:solidFill>
-              <a:schemeClr val="tx1">
-                <a:lumMod val="65000"/>
-                <a:lumOff val="35000"/>
-              </a:schemeClr>
-            </a:solidFill>
-          </a:ln>
-        </p:spPr>
-        <p:txBody>
-          <a:bodyPr wrap="none" rtlCol="0">
-            <a:spAutoFit/>
-          </a:bodyPr>
-          <a:lstStyle/>
-          <a:p>
-            <a:r>
-              <a:rPr lang="en-US" sz="2600" b="1" dirty="0">
-                <a:latin typeface="Courier New" panose="02070309020205020404" pitchFamily="49" charset="0"/>
-                <a:cs typeface="Courier New" panose="02070309020205020404" pitchFamily="49" charset="0"/>
-              </a:rPr>
-              <a:t>while X &lt; 100:</a:t>
-            </a:r>
-          </a:p>
-          <a:p>
-            <a:r>
-              <a:rPr lang="en-US" sz="2600" b="1" dirty="0">
-                <a:latin typeface="Courier New" panose="02070309020205020404" pitchFamily="49" charset="0"/>
-                <a:cs typeface="Courier New" panose="02070309020205020404" pitchFamily="49" charset="0"/>
-              </a:rPr>
-              <a:t>	X = X + 2	</a:t>
-            </a:r>
-          </a:p>
-          <a:p>
-            <a:r>
-              <a:rPr lang="en-US" sz="2600" b="1" dirty="0">
-                <a:latin typeface="Courier New" panose="02070309020205020404" pitchFamily="49" charset="0"/>
-                <a:cs typeface="Courier New" panose="02070309020205020404" pitchFamily="49" charset="0"/>
-              </a:rPr>
-              <a:t>	print(X)</a:t>
-            </a:r>
-          </a:p>
-        </p:txBody>
-      </p:sp>
-      <p:sp>
-        <p:nvSpPr>
-          <p:cNvPr id="3" name="TextBox 2">
-            <a:extLst>
-              <a:ext uri="{FF2B5EF4-FFF2-40B4-BE49-F238E27FC236}">
-                <a16:creationId xmlns:a16="http://schemas.microsoft.com/office/drawing/2014/main" id="{342297FB-DFAC-9D4C-9510-8915D875C53B}"/>
-              </a:ext>
-            </a:extLst>
-          </p:cNvPr>
-          <p:cNvSpPr txBox="1"/>
-          <p:nvPr/>
-        </p:nvSpPr>
-        <p:spPr>
-          <a:xfrm>
-            <a:off x="6976210" y="1436850"/>
-            <a:ext cx="1782860" cy="523220"/>
-          </a:xfrm>
-          <a:prstGeom prst="rect">
-            <a:avLst/>
-          </a:prstGeom>
-          <a:noFill/>
-        </p:spPr>
-        <p:txBody>
-          <a:bodyPr wrap="none" rtlCol="0">
-            <a:spAutoFit/>
-          </a:bodyPr>
-          <a:lstStyle/>
-          <a:p>
-            <a:r>
-              <a:rPr lang="en-US" sz="2800" b="1" dirty="0">
-                <a:latin typeface="Helvetica Light" panose="020B0403020202020204" pitchFamily="34" charset="0"/>
-              </a:rPr>
-              <a:t>In python:</a:t>
-            </a:r>
-          </a:p>
-        </p:txBody>
-      </p:sp>
-      <p:sp>
-        <p:nvSpPr>
-          <p:cNvPr id="16" name="TextBox 15">
-            <a:extLst>
-              <a:ext uri="{FF2B5EF4-FFF2-40B4-BE49-F238E27FC236}">
-                <a16:creationId xmlns:a16="http://schemas.microsoft.com/office/drawing/2014/main" id="{69D0168A-BD1A-9C4E-B04D-AFEEB55A52FD}"/>
-              </a:ext>
-            </a:extLst>
-          </p:cNvPr>
-          <p:cNvSpPr txBox="1"/>
-          <p:nvPr/>
-        </p:nvSpPr>
-        <p:spPr>
-          <a:xfrm>
-            <a:off x="3202848" y="1452239"/>
-            <a:ext cx="1740286" cy="492443"/>
-          </a:xfrm>
-          <a:prstGeom prst="rect">
-            <a:avLst/>
-          </a:prstGeom>
-          <a:noFill/>
-          <a:ln w="31750">
-            <a:solidFill>
-              <a:schemeClr val="accent1">
-                <a:shade val="50000"/>
-              </a:schemeClr>
-            </a:solidFill>
-          </a:ln>
-        </p:spPr>
-        <p:txBody>
-          <a:bodyPr wrap="square" rtlCol="0">
-            <a:spAutoFit/>
-          </a:bodyPr>
-          <a:lstStyle/>
-          <a:p>
-            <a:pPr algn="ctr"/>
-            <a:r>
-              <a:rPr lang="en-US" sz="2600" dirty="0">
-                <a:latin typeface="Helvetica Light" panose="020B0403020202020204" pitchFamily="34" charset="0"/>
-              </a:rPr>
-              <a:t>Input</a:t>
-            </a:r>
-          </a:p>
-        </p:txBody>
-      </p:sp>
-      <p:sp>
-        <p:nvSpPr>
-          <p:cNvPr id="17" name="TextBox 16">
-            <a:extLst>
-              <a:ext uri="{FF2B5EF4-FFF2-40B4-BE49-F238E27FC236}">
-                <a16:creationId xmlns:a16="http://schemas.microsoft.com/office/drawing/2014/main" id="{2D65D532-E3CF-3740-A4D0-1CB5EE8B6FAE}"/>
-              </a:ext>
-            </a:extLst>
-          </p:cNvPr>
-          <p:cNvSpPr txBox="1"/>
-          <p:nvPr/>
-        </p:nvSpPr>
-        <p:spPr>
-          <a:xfrm>
-            <a:off x="2744820" y="2455808"/>
-            <a:ext cx="2672526" cy="492443"/>
-          </a:xfrm>
-          <a:prstGeom prst="rect">
-            <a:avLst/>
-          </a:prstGeom>
-          <a:noFill/>
-          <a:ln w="31750">
-            <a:solidFill>
-              <a:schemeClr val="accent1">
-                <a:shade val="50000"/>
-              </a:schemeClr>
-            </a:solidFill>
-          </a:ln>
-        </p:spPr>
-        <p:txBody>
-          <a:bodyPr wrap="none" rtlCol="0">
-            <a:spAutoFit/>
-          </a:bodyPr>
-          <a:lstStyle/>
-          <a:p>
-            <a:r>
-              <a:rPr lang="en-US" sz="2600" dirty="0">
-                <a:latin typeface="Helvetica Light" panose="020B0403020202020204" pitchFamily="34" charset="0"/>
-              </a:rPr>
-              <a:t>other statements</a:t>
-            </a:r>
-          </a:p>
-        </p:txBody>
-      </p:sp>
-      <p:sp>
-        <p:nvSpPr>
-          <p:cNvPr id="18" name="TextBox 17">
-            <a:extLst>
-              <a:ext uri="{FF2B5EF4-FFF2-40B4-BE49-F238E27FC236}">
-                <a16:creationId xmlns:a16="http://schemas.microsoft.com/office/drawing/2014/main" id="{899E9AC7-020E-3B45-820F-08991B08911A}"/>
-              </a:ext>
-            </a:extLst>
-          </p:cNvPr>
-          <p:cNvSpPr txBox="1"/>
-          <p:nvPr/>
-        </p:nvSpPr>
-        <p:spPr>
-          <a:xfrm>
-            <a:off x="2691951" y="3562369"/>
-            <a:ext cx="2778263" cy="892552"/>
-          </a:xfrm>
-          <a:prstGeom prst="rect">
-            <a:avLst/>
-          </a:prstGeom>
-          <a:noFill/>
-          <a:ln w="31750">
-            <a:solidFill>
-              <a:srgbClr val="C00000"/>
-            </a:solidFill>
-          </a:ln>
-        </p:spPr>
-        <p:txBody>
-          <a:bodyPr wrap="square" rtlCol="0">
-            <a:spAutoFit/>
-          </a:bodyPr>
-          <a:lstStyle/>
-          <a:p>
-            <a:pPr algn="ctr"/>
-            <a:r>
-              <a:rPr lang="en-US" sz="2600" b="1" dirty="0">
-                <a:latin typeface="Helvetica Light" panose="020B0403020202020204" pitchFamily="34" charset="0"/>
-              </a:rPr>
-              <a:t>while </a:t>
-            </a:r>
-          </a:p>
-          <a:p>
-            <a:pPr algn="ctr"/>
-            <a:r>
-              <a:rPr lang="en-US" sz="2600" dirty="0">
-                <a:latin typeface="Helvetica Light" panose="020B0403020202020204" pitchFamily="34" charset="0"/>
-              </a:rPr>
-              <a:t>(condition is true)</a:t>
-            </a:r>
-          </a:p>
-        </p:txBody>
-      </p:sp>
-      <p:cxnSp>
-        <p:nvCxnSpPr>
-          <p:cNvPr id="19" name="Straight Arrow Connector 18">
-            <a:extLst>
-              <a:ext uri="{FF2B5EF4-FFF2-40B4-BE49-F238E27FC236}">
-                <a16:creationId xmlns:a16="http://schemas.microsoft.com/office/drawing/2014/main" id="{7BE915EC-514A-D341-AE14-58115A232A48}"/>
-              </a:ext>
-            </a:extLst>
-          </p:cNvPr>
-          <p:cNvCxnSpPr>
-            <a:cxnSpLocks/>
-          </p:cNvCxnSpPr>
-          <p:nvPr/>
-        </p:nvCxnSpPr>
-        <p:spPr>
-          <a:xfrm>
-            <a:off x="4081083" y="2062462"/>
-            <a:ext cx="0" cy="291313"/>
-          </a:xfrm>
-          <a:prstGeom prst="straightConnector1">
-            <a:avLst/>
-          </a:prstGeom>
-          <a:ln w="25400">
-            <a:solidFill>
-              <a:schemeClr val="tx1">
-                <a:lumMod val="50000"/>
-                <a:lumOff val="50000"/>
-              </a:schemeClr>
-            </a:solidFill>
-            <a:tailEnd type="triangle"/>
-          </a:ln>
-        </p:spPr>
-        <p:style>
-          <a:lnRef idx="1">
-            <a:schemeClr val="accent1"/>
-          </a:lnRef>
-          <a:fillRef idx="0">
-            <a:schemeClr val="accent1"/>
-          </a:fillRef>
-          <a:effectRef idx="0">
-            <a:schemeClr val="accent1"/>
-          </a:effectRef>
-          <a:fontRef idx="minor">
-            <a:schemeClr val="tx1"/>
-          </a:fontRef>
-        </p:style>
-      </p:cxnSp>
-      <p:cxnSp>
-        <p:nvCxnSpPr>
-          <p:cNvPr id="20" name="Straight Arrow Connector 19">
-            <a:extLst>
-              <a:ext uri="{FF2B5EF4-FFF2-40B4-BE49-F238E27FC236}">
-                <a16:creationId xmlns:a16="http://schemas.microsoft.com/office/drawing/2014/main" id="{7D5A2D02-4CD9-B341-8BB0-785F082054C6}"/>
-              </a:ext>
-            </a:extLst>
-          </p:cNvPr>
-          <p:cNvCxnSpPr>
-            <a:cxnSpLocks/>
-          </p:cNvCxnSpPr>
-          <p:nvPr/>
-        </p:nvCxnSpPr>
-        <p:spPr>
-          <a:xfrm>
-            <a:off x="4072991" y="3104312"/>
-            <a:ext cx="0" cy="291313"/>
-          </a:xfrm>
-          <a:prstGeom prst="straightConnector1">
-            <a:avLst/>
-          </a:prstGeom>
-          <a:ln w="25400">
-            <a:solidFill>
-              <a:schemeClr val="tx1">
-                <a:lumMod val="50000"/>
-                <a:lumOff val="50000"/>
-              </a:schemeClr>
-            </a:solidFill>
-            <a:tailEnd type="triangle"/>
-          </a:ln>
-        </p:spPr>
-        <p:style>
-          <a:lnRef idx="1">
-            <a:schemeClr val="accent1"/>
-          </a:lnRef>
-          <a:fillRef idx="0">
-            <a:schemeClr val="accent1"/>
-          </a:fillRef>
-          <a:effectRef idx="0">
-            <a:schemeClr val="accent1"/>
-          </a:effectRef>
-          <a:fontRef idx="minor">
-            <a:schemeClr val="tx1"/>
-          </a:fontRef>
-        </p:style>
-      </p:cxnSp>
-      <p:sp>
-        <p:nvSpPr>
-          <p:cNvPr id="21" name="Circular Arrow 20">
-            <a:extLst>
-              <a:ext uri="{FF2B5EF4-FFF2-40B4-BE49-F238E27FC236}">
-                <a16:creationId xmlns:a16="http://schemas.microsoft.com/office/drawing/2014/main" id="{A4BF2102-64CD-074C-BB48-26F949FD6FD4}"/>
-              </a:ext>
-            </a:extLst>
-          </p:cNvPr>
-          <p:cNvSpPr/>
-          <p:nvPr/>
-        </p:nvSpPr>
-        <p:spPr>
-          <a:xfrm rot="5400000">
-            <a:off x="4569477" y="3634817"/>
-            <a:ext cx="1914038" cy="2100391"/>
-          </a:xfrm>
-          <a:prstGeom prst="circularArrow">
-            <a:avLst/>
-          </a:prstGeom>
-          <a:solidFill>
-            <a:schemeClr val="tx1">
-              <a:lumMod val="50000"/>
-              <a:lumOff val="50000"/>
-            </a:schemeClr>
-          </a:solidFill>
-          <a:ln w="0">
-            <a:solidFill>
-              <a:schemeClr val="bg1">
-                <a:lumMod val="50000"/>
-              </a:schemeClr>
-            </a:solidFill>
-          </a:ln>
-        </p:spPr>
-        <p:style>
-          <a:lnRef idx="2">
-            <a:schemeClr val="accent1">
-              <a:shade val="50000"/>
-            </a:schemeClr>
-          </a:lnRef>
-          <a:fillRef idx="1">
-            <a:schemeClr val="accent1"/>
-          </a:fillRef>
-          <a:effectRef idx="0">
-            <a:schemeClr val="accent1"/>
-          </a:effectRef>
-          <a:fontRef idx="minor">
-            <a:schemeClr val="lt1"/>
-          </a:fontRef>
-        </p:style>
-        <p:txBody>
-          <a:bodyPr rtlCol="0" anchor="ctr"/>
-          <a:lstStyle/>
-          <a:p>
-            <a:pPr algn="ctr"/>
-            <a:endParaRPr lang="en-US">
-              <a:solidFill>
-                <a:schemeClr val="tx1"/>
-              </a:solidFill>
-            </a:endParaRPr>
-          </a:p>
-        </p:txBody>
-      </p:sp>
-      <p:sp>
-        <p:nvSpPr>
-          <p:cNvPr id="22" name="Circular Arrow 21">
-            <a:extLst>
-              <a:ext uri="{FF2B5EF4-FFF2-40B4-BE49-F238E27FC236}">
-                <a16:creationId xmlns:a16="http://schemas.microsoft.com/office/drawing/2014/main" id="{185A91F7-F176-7542-BC15-9B72EA0C6500}"/>
-              </a:ext>
-            </a:extLst>
-          </p:cNvPr>
-          <p:cNvSpPr/>
-          <p:nvPr/>
-        </p:nvSpPr>
-        <p:spPr>
-          <a:xfrm rot="16200000">
-            <a:off x="1687760" y="3687553"/>
-            <a:ext cx="1914038" cy="2100391"/>
-          </a:xfrm>
-          <a:prstGeom prst="circularArrow">
-            <a:avLst/>
-          </a:prstGeom>
-          <a:solidFill>
-            <a:schemeClr val="bg1">
-              <a:lumMod val="50000"/>
-            </a:schemeClr>
-          </a:solidFill>
-          <a:ln w="0">
-            <a:solidFill>
-              <a:schemeClr val="tx1">
-                <a:lumMod val="50000"/>
-                <a:lumOff val="50000"/>
-              </a:schemeClr>
-            </a:solidFill>
-          </a:ln>
-        </p:spPr>
-        <p:style>
-          <a:lnRef idx="2">
-            <a:schemeClr val="accent1">
-              <a:shade val="50000"/>
-            </a:schemeClr>
-          </a:lnRef>
-          <a:fillRef idx="1">
-            <a:schemeClr val="accent1"/>
-          </a:fillRef>
-          <a:effectRef idx="0">
-            <a:schemeClr val="accent1"/>
-          </a:effectRef>
-          <a:fontRef idx="minor">
-            <a:schemeClr val="lt1"/>
-          </a:fontRef>
-        </p:style>
-        <p:txBody>
-          <a:bodyPr rtlCol="0" anchor="ctr"/>
-          <a:lstStyle/>
-          <a:p>
-            <a:pPr algn="ctr"/>
-            <a:endParaRPr lang="en-US">
-              <a:solidFill>
-                <a:schemeClr val="tx1"/>
-              </a:solidFill>
-            </a:endParaRPr>
-          </a:p>
-        </p:txBody>
-      </p:sp>
-      <p:sp>
-        <p:nvSpPr>
-          <p:cNvPr id="23" name="TextBox 22">
-            <a:extLst>
-              <a:ext uri="{FF2B5EF4-FFF2-40B4-BE49-F238E27FC236}">
-                <a16:creationId xmlns:a16="http://schemas.microsoft.com/office/drawing/2014/main" id="{711C4F67-6C74-3A47-A072-2AB85A0C8CBD}"/>
-              </a:ext>
-            </a:extLst>
-          </p:cNvPr>
-          <p:cNvSpPr txBox="1"/>
-          <p:nvPr/>
-        </p:nvSpPr>
-        <p:spPr>
-          <a:xfrm>
-            <a:off x="2744821" y="5129112"/>
-            <a:ext cx="2749672" cy="1200329"/>
-          </a:xfrm>
-          <a:prstGeom prst="rect">
-            <a:avLst/>
-          </a:prstGeom>
-          <a:noFill/>
-          <a:ln w="31750">
-            <a:solidFill>
-              <a:schemeClr val="accent1">
-                <a:shade val="50000"/>
-              </a:schemeClr>
-            </a:solidFill>
-          </a:ln>
-        </p:spPr>
-        <p:txBody>
-          <a:bodyPr wrap="square" rtlCol="0">
-            <a:spAutoFit/>
-          </a:bodyPr>
-          <a:lstStyle/>
-          <a:p>
-            <a:pPr algn="ctr"/>
-            <a:r>
-              <a:rPr lang="en-US" sz="2600" dirty="0">
-                <a:latin typeface="Helvetica Light" panose="020B0403020202020204" pitchFamily="34" charset="0"/>
-              </a:rPr>
-              <a:t>Do something</a:t>
-            </a:r>
-          </a:p>
-          <a:p>
-            <a:pPr algn="ctr"/>
-            <a:r>
-              <a:rPr lang="en-US" sz="2300" dirty="0">
-                <a:latin typeface="Helvetica Light" panose="020B0403020202020204" pitchFamily="34" charset="0"/>
-              </a:rPr>
-              <a:t>(exit loop when nothing left to do)</a:t>
-            </a:r>
-          </a:p>
-        </p:txBody>
-      </p:sp>
-      <p:sp>
-        <p:nvSpPr>
-          <p:cNvPr id="24" name="Rectangle 23">
-            <a:extLst>
-              <a:ext uri="{FF2B5EF4-FFF2-40B4-BE49-F238E27FC236}">
-                <a16:creationId xmlns:a16="http://schemas.microsoft.com/office/drawing/2014/main" id="{194DEB45-FD0B-5B40-9BBD-7C8467FD63AC}"/>
-              </a:ext>
-            </a:extLst>
-          </p:cNvPr>
-          <p:cNvSpPr/>
-          <p:nvPr/>
-        </p:nvSpPr>
-        <p:spPr>
-          <a:xfrm>
-            <a:off x="2886157" y="453098"/>
-            <a:ext cx="7892434" cy="677108"/>
-          </a:xfrm>
-          <a:prstGeom prst="rect">
-            <a:avLst/>
-          </a:prstGeom>
-        </p:spPr>
-        <p:txBody>
-          <a:bodyPr wrap="square">
-            <a:spAutoFit/>
-          </a:bodyPr>
-          <a:lstStyle/>
-          <a:p>
-            <a:r>
-              <a:rPr lang="en-US" sz="3800" b="1" dirty="0">
-                <a:latin typeface="Helvetica Light" panose="020B0403020202020204" pitchFamily="34" charset="0"/>
-              </a:rPr>
-              <a:t>while</a:t>
-            </a:r>
-            <a:r>
-              <a:rPr lang="en-US" sz="3200" b="1" dirty="0">
-                <a:latin typeface="Helvetica Light" panose="020B0403020202020204" pitchFamily="34" charset="0"/>
-              </a:rPr>
-              <a:t>	</a:t>
-            </a:r>
-            <a:r>
-              <a:rPr lang="en-US" sz="3200" dirty="0">
-                <a:latin typeface="Helvetica Light" panose="020B0403020202020204" pitchFamily="34" charset="0"/>
-              </a:rPr>
-              <a:t>iterative loop</a:t>
-            </a:r>
-            <a:r>
-              <a:rPr lang="en-US" sz="3200" b="1" dirty="0">
-                <a:latin typeface="Helvetica Light" panose="020B0403020202020204" pitchFamily="34" charset="0"/>
-              </a:rPr>
-              <a:t>	</a:t>
-            </a:r>
-          </a:p>
-        </p:txBody>
-      </p:sp>
-    </p:spTree>
-    <p:extLst>
-      <p:ext uri="{BB962C8B-B14F-4D97-AF65-F5344CB8AC3E}">
-        <p14:creationId xmlns:p14="http://schemas.microsoft.com/office/powerpoint/2010/main" val="2874074153"/>
       </p:ext>
     </p:extLst>
   </p:cSld>
@@ -10261,7 +9845,7 @@
           <p:cNvPr id="2" name="TextBox 1">
             <a:extLst>
               <a:ext uri="{FF2B5EF4-FFF2-40B4-BE49-F238E27FC236}">
-                <a16:creationId xmlns:a16="http://schemas.microsoft.com/office/drawing/2014/main" id="{3712C3A7-9D04-7D4D-8D49-C10A93131485}"/>
+                <a16:creationId xmlns:a16="http://schemas.microsoft.com/office/drawing/2014/main" id="{BBAC2BDB-BA0E-3941-961A-D3A5A5D22E7D}"/>
               </a:ext>
             </a:extLst>
           </p:cNvPr>
@@ -10270,13 +9854,21 @@
         </p:nvSpPr>
         <p:spPr>
           <a:xfrm>
-            <a:off x="4277162" y="678878"/>
-            <a:ext cx="2534668" cy="600164"/>
+            <a:off x="6976210" y="2150205"/>
+            <a:ext cx="2989921" cy="1292662"/>
           </a:xfrm>
           <a:prstGeom prst="rect">
             <a:avLst/>
           </a:prstGeom>
           <a:noFill/>
+          <a:ln w="12700">
+            <a:solidFill>
+              <a:schemeClr val="tx1">
+                <a:lumMod val="65000"/>
+                <a:lumOff val="35000"/>
+              </a:schemeClr>
+            </a:solidFill>
+          </a:ln>
         </p:spPr>
         <p:txBody>
           <a:bodyPr wrap="none" rtlCol="0">
@@ -10285,14 +9877,30 @@
           <a:lstStyle/>
           <a:p>
             <a:r>
-              <a:rPr lang="en-US" sz="3300" dirty="0" err="1">
-                <a:latin typeface="Helvetica Light" panose="020B0403020202020204" pitchFamily="34" charset="0"/>
-              </a:rPr>
-              <a:t>Input/Output</a:t>
-            </a:r>
-            <a:endParaRPr lang="en-US" sz="3300" dirty="0">
-              <a:latin typeface="Helvetica Light" panose="020B0403020202020204" pitchFamily="34" charset="0"/>
-            </a:endParaRPr>
+              <a:rPr lang="en-US" sz="2600" b="1" dirty="0">
+                <a:latin typeface="Courier New" panose="02070309020205020404" pitchFamily="49" charset="0"/>
+                <a:cs typeface="Courier New" panose="02070309020205020404" pitchFamily="49" charset="0"/>
+              </a:rPr>
+              <a:t>while X &lt; 100:</a:t>
+            </a:r>
+          </a:p>
+          <a:p>
+            <a:r>
+              <a:rPr lang="en-US" sz="2600" b="1" dirty="0">
+                <a:latin typeface="Courier New" panose="02070309020205020404" pitchFamily="49" charset="0"/>
+                <a:cs typeface="Courier New" panose="02070309020205020404" pitchFamily="49" charset="0"/>
+              </a:rPr>
+              <a:t>	X = X + 2	</a:t>
+            </a:r>
+          </a:p>
+          <a:p>
+            <a:r>
+              <a:rPr lang="en-US" sz="2600" b="1" dirty="0">
+                <a:latin typeface="Courier New" panose="02070309020205020404" pitchFamily="49" charset="0"/>
+                <a:cs typeface="Courier New" panose="02070309020205020404" pitchFamily="49" charset="0"/>
+              </a:rPr>
+              <a:t>	print(X)</a:t>
+            </a:r>
           </a:p>
         </p:txBody>
       </p:sp>
@@ -10301,7 +9909,7 @@
           <p:cNvPr id="3" name="TextBox 2">
             <a:extLst>
               <a:ext uri="{FF2B5EF4-FFF2-40B4-BE49-F238E27FC236}">
-                <a16:creationId xmlns:a16="http://schemas.microsoft.com/office/drawing/2014/main" id="{3AA4CEF9-8B7D-AC4A-842B-E210353E36AC}"/>
+                <a16:creationId xmlns:a16="http://schemas.microsoft.com/office/drawing/2014/main" id="{342297FB-DFAC-9D4C-9510-8915D875C53B}"/>
               </a:ext>
             </a:extLst>
           </p:cNvPr>
@@ -10310,8 +9918,8 @@
         </p:nvSpPr>
         <p:spPr>
           <a:xfrm>
-            <a:off x="772998" y="1923068"/>
-            <a:ext cx="10796545" cy="461665"/>
+            <a:off x="6976210" y="1436850"/>
+            <a:ext cx="1782860" cy="523220"/>
           </a:xfrm>
           <a:prstGeom prst="rect">
             <a:avLst/>
@@ -10325,44 +9933,20 @@
           <a:lstStyle/>
           <a:p>
             <a:r>
-              <a:rPr lang="en-US" sz="2400" dirty="0">
-                <a:latin typeface="Helvetica Light" panose="020B0403020202020204" pitchFamily="34" charset="0"/>
-              </a:rPr>
-              <a:t>- Nearly always, your programs will </a:t>
-            </a:r>
-            <a:r>
-              <a:rPr lang="en-US" sz="2400" b="1" dirty="0">
-                <a:latin typeface="Helvetica Light" panose="020B0403020202020204" pitchFamily="34" charset="0"/>
-              </a:rPr>
-              <a:t>process</a:t>
-            </a:r>
-            <a:r>
-              <a:rPr lang="en-US" sz="2400" dirty="0">
-                <a:latin typeface="Helvetica Light" panose="020B0403020202020204" pitchFamily="34" charset="0"/>
-              </a:rPr>
-              <a:t> information </a:t>
-            </a:r>
-            <a:r>
-              <a:rPr lang="en-US" sz="2400" b="1" dirty="0">
-                <a:latin typeface="Helvetica Light" panose="020B0403020202020204" pitchFamily="34" charset="0"/>
-              </a:rPr>
-              <a:t>from</a:t>
-            </a:r>
-            <a:r>
-              <a:rPr lang="en-US" sz="2400" dirty="0">
-                <a:latin typeface="Helvetica Light" panose="020B0403020202020204" pitchFamily="34" charset="0"/>
-              </a:rPr>
-              <a:t> files you specify</a:t>
-            </a:r>
-          </a:p>
-        </p:txBody>
-      </p:sp>
-      <p:sp>
-        <p:nvSpPr>
-          <p:cNvPr id="4" name="TextBox 3">
-            <a:extLst>
-              <a:ext uri="{FF2B5EF4-FFF2-40B4-BE49-F238E27FC236}">
-                <a16:creationId xmlns:a16="http://schemas.microsoft.com/office/drawing/2014/main" id="{813D4770-6C50-644C-B0CF-470988DE7D1D}"/>
+              <a:rPr lang="en-US" sz="2800" b="1" dirty="0">
+                <a:latin typeface="Helvetica Light" panose="020B0403020202020204" pitchFamily="34" charset="0"/>
+              </a:rPr>
+              <a:t>In python:</a:t>
+            </a:r>
+          </a:p>
+        </p:txBody>
+      </p:sp>
+      <p:sp>
+        <p:nvSpPr>
+          <p:cNvPr id="16" name="TextBox 15">
+            <a:extLst>
+              <a:ext uri="{FF2B5EF4-FFF2-40B4-BE49-F238E27FC236}">
+                <a16:creationId xmlns:a16="http://schemas.microsoft.com/office/drawing/2014/main" id="{69D0168A-BD1A-9C4E-B04D-AFEEB55A52FD}"/>
               </a:ext>
             </a:extLst>
           </p:cNvPr>
@@ -10371,59 +9955,43 @@
         </p:nvSpPr>
         <p:spPr>
           <a:xfrm>
-            <a:off x="772998" y="3429000"/>
-            <a:ext cx="9975808" cy="461665"/>
+            <a:off x="3202848" y="1452239"/>
+            <a:ext cx="1740286" cy="492443"/>
           </a:xfrm>
           <a:prstGeom prst="rect">
             <a:avLst/>
           </a:prstGeom>
           <a:noFill/>
-        </p:spPr>
-        <p:txBody>
-          <a:bodyPr wrap="none" rtlCol="0">
+          <a:ln w="31750">
+            <a:solidFill>
+              <a:schemeClr val="accent1">
+                <a:shade val="50000"/>
+              </a:schemeClr>
+            </a:solidFill>
+          </a:ln>
+        </p:spPr>
+        <p:txBody>
+          <a:bodyPr wrap="square" rtlCol="0">
             <a:spAutoFit/>
           </a:bodyPr>
           <a:lstStyle/>
           <a:p>
-            <a:r>
-              <a:rPr lang="en-US" sz="2400" dirty="0">
-                <a:latin typeface="Helvetica Light" panose="020B0403020202020204" pitchFamily="34" charset="0"/>
-              </a:rPr>
-              <a:t>- Nearly always, your programs will </a:t>
-            </a:r>
-            <a:r>
-              <a:rPr lang="en-US" sz="2400" b="1" dirty="0">
-                <a:latin typeface="Helvetica Light" panose="020B0403020202020204" pitchFamily="34" charset="0"/>
-              </a:rPr>
-              <a:t>write</a:t>
-            </a:r>
-            <a:r>
-              <a:rPr lang="en-US" sz="2400" dirty="0">
-                <a:latin typeface="Helvetica Light" panose="020B0403020202020204" pitchFamily="34" charset="0"/>
-              </a:rPr>
-              <a:t> information </a:t>
-            </a:r>
-            <a:r>
-              <a:rPr lang="en-US" sz="2400" b="1" dirty="0">
-                <a:latin typeface="Helvetica Light" panose="020B0403020202020204" pitchFamily="34" charset="0"/>
-              </a:rPr>
-              <a:t>to</a:t>
-            </a:r>
-            <a:r>
-              <a:rPr lang="en-US" sz="2400" dirty="0">
-                <a:latin typeface="Helvetica Light" panose="020B0403020202020204" pitchFamily="34" charset="0"/>
-              </a:rPr>
-              <a:t> files you specify</a:t>
-            </a:r>
-          </a:p>
-        </p:txBody>
-      </p:sp>
-      <p:sp>
-        <p:nvSpPr>
-          <p:cNvPr id="6" name="TextBox 5">
-            <a:extLst>
-              <a:ext uri="{FF2B5EF4-FFF2-40B4-BE49-F238E27FC236}">
-                <a16:creationId xmlns:a16="http://schemas.microsoft.com/office/drawing/2014/main" id="{D40E54A4-CE4D-2A4B-A94A-DBCDD423FDF2}"/>
+            <a:pPr algn="ctr"/>
+            <a:r>
+              <a:rPr lang="en-US" sz="2600" dirty="0">
+                <a:latin typeface="Helvetica Light" panose="020B0403020202020204" pitchFamily="34" charset="0"/>
+              </a:rPr>
+              <a:t>Input</a:t>
+            </a:r>
+          </a:p>
+        </p:txBody>
+      </p:sp>
+      <p:sp>
+        <p:nvSpPr>
+          <p:cNvPr id="17" name="TextBox 16">
+            <a:extLst>
+              <a:ext uri="{FF2B5EF4-FFF2-40B4-BE49-F238E27FC236}">
+                <a16:creationId xmlns:a16="http://schemas.microsoft.com/office/drawing/2014/main" id="{2D65D532-E3CF-3740-A4D0-1CB5EE8B6FAE}"/>
               </a:ext>
             </a:extLst>
           </p:cNvPr>
@@ -10432,13 +10000,62 @@
         </p:nvSpPr>
         <p:spPr>
           <a:xfrm>
-            <a:off x="772998" y="4657125"/>
-            <a:ext cx="11203215" cy="830997"/>
+            <a:off x="2744820" y="2455808"/>
+            <a:ext cx="2672526" cy="492443"/>
           </a:xfrm>
           <a:prstGeom prst="rect">
             <a:avLst/>
           </a:prstGeom>
           <a:noFill/>
+          <a:ln w="31750">
+            <a:solidFill>
+              <a:schemeClr val="accent1">
+                <a:shade val="50000"/>
+              </a:schemeClr>
+            </a:solidFill>
+          </a:ln>
+        </p:spPr>
+        <p:txBody>
+          <a:bodyPr wrap="none" rtlCol="0">
+            <a:spAutoFit/>
+          </a:bodyPr>
+          <a:lstStyle/>
+          <a:p>
+            <a:r>
+              <a:rPr lang="en-US" sz="2600" dirty="0">
+                <a:latin typeface="Helvetica Light" panose="020B0403020202020204" pitchFamily="34" charset="0"/>
+              </a:rPr>
+              <a:t>other statements</a:t>
+            </a:r>
+          </a:p>
+        </p:txBody>
+      </p:sp>
+      <p:sp>
+        <p:nvSpPr>
+          <p:cNvPr id="18" name="TextBox 17">
+            <a:extLst>
+              <a:ext uri="{FF2B5EF4-FFF2-40B4-BE49-F238E27FC236}">
+                <a16:creationId xmlns:a16="http://schemas.microsoft.com/office/drawing/2014/main" id="{899E9AC7-020E-3B45-820F-08991B08911A}"/>
+              </a:ext>
+            </a:extLst>
+          </p:cNvPr>
+          <p:cNvSpPr txBox="1"/>
+          <p:nvPr/>
+        </p:nvSpPr>
+        <p:spPr>
+          <a:xfrm>
+            <a:off x="2691951" y="3562369"/>
+            <a:ext cx="2778263" cy="892552"/>
+          </a:xfrm>
+          <a:prstGeom prst="rect">
+            <a:avLst/>
+          </a:prstGeom>
+          <a:noFill/>
+          <a:ln w="31750">
+            <a:solidFill>
+              <a:srgbClr val="C00000"/>
+            </a:solidFill>
+          </a:ln>
         </p:spPr>
         <p:txBody>
           <a:bodyPr wrap="square" rtlCol="0">
@@ -10446,11 +10063,349 @@
           </a:bodyPr>
           <a:lstStyle/>
           <a:p>
-            <a:r>
-              <a:rPr lang="en-US" sz="2400" dirty="0">
-                <a:latin typeface="Helvetica Light" panose="020B0403020202020204" pitchFamily="34" charset="0"/>
-              </a:rPr>
-              <a:t>- Sometimes this will involve one file at a time; often it will involve many (which can be just as easy) </a:t>
+            <a:pPr algn="ctr"/>
+            <a:r>
+              <a:rPr lang="en-US" sz="2600" b="1" dirty="0">
+                <a:latin typeface="Helvetica Light" panose="020B0403020202020204" pitchFamily="34" charset="0"/>
+              </a:rPr>
+              <a:t>while </a:t>
+            </a:r>
+          </a:p>
+          <a:p>
+            <a:pPr algn="ctr"/>
+            <a:r>
+              <a:rPr lang="en-US" sz="2600" dirty="0">
+                <a:latin typeface="Helvetica Light" panose="020B0403020202020204" pitchFamily="34" charset="0"/>
+              </a:rPr>
+              <a:t>(condition is true)</a:t>
+            </a:r>
+          </a:p>
+        </p:txBody>
+      </p:sp>
+      <p:cxnSp>
+        <p:nvCxnSpPr>
+          <p:cNvPr id="19" name="Straight Arrow Connector 18">
+            <a:extLst>
+              <a:ext uri="{FF2B5EF4-FFF2-40B4-BE49-F238E27FC236}">
+                <a16:creationId xmlns:a16="http://schemas.microsoft.com/office/drawing/2014/main" id="{7BE915EC-514A-D341-AE14-58115A232A48}"/>
+              </a:ext>
+            </a:extLst>
+          </p:cNvPr>
+          <p:cNvCxnSpPr>
+            <a:cxnSpLocks/>
+          </p:cNvCxnSpPr>
+          <p:nvPr/>
+        </p:nvCxnSpPr>
+        <p:spPr>
+          <a:xfrm>
+            <a:off x="4081083" y="2062462"/>
+            <a:ext cx="0" cy="291313"/>
+          </a:xfrm>
+          <a:prstGeom prst="straightConnector1">
+            <a:avLst/>
+          </a:prstGeom>
+          <a:ln w="25400">
+            <a:solidFill>
+              <a:schemeClr val="tx1">
+                <a:lumMod val="50000"/>
+                <a:lumOff val="50000"/>
+              </a:schemeClr>
+            </a:solidFill>
+            <a:tailEnd type="triangle"/>
+          </a:ln>
+        </p:spPr>
+        <p:style>
+          <a:lnRef idx="1">
+            <a:schemeClr val="accent1"/>
+          </a:lnRef>
+          <a:fillRef idx="0">
+            <a:schemeClr val="accent1"/>
+          </a:fillRef>
+          <a:effectRef idx="0">
+            <a:schemeClr val="accent1"/>
+          </a:effectRef>
+          <a:fontRef idx="minor">
+            <a:schemeClr val="tx1"/>
+          </a:fontRef>
+        </p:style>
+      </p:cxnSp>
+      <p:cxnSp>
+        <p:nvCxnSpPr>
+          <p:cNvPr id="20" name="Straight Arrow Connector 19">
+            <a:extLst>
+              <a:ext uri="{FF2B5EF4-FFF2-40B4-BE49-F238E27FC236}">
+                <a16:creationId xmlns:a16="http://schemas.microsoft.com/office/drawing/2014/main" id="{7D5A2D02-4CD9-B341-8BB0-785F082054C6}"/>
+              </a:ext>
+            </a:extLst>
+          </p:cNvPr>
+          <p:cNvCxnSpPr>
+            <a:cxnSpLocks/>
+          </p:cNvCxnSpPr>
+          <p:nvPr/>
+        </p:nvCxnSpPr>
+        <p:spPr>
+          <a:xfrm>
+            <a:off x="4072991" y="3104312"/>
+            <a:ext cx="0" cy="291313"/>
+          </a:xfrm>
+          <a:prstGeom prst="straightConnector1">
+            <a:avLst/>
+          </a:prstGeom>
+          <a:ln w="25400">
+            <a:solidFill>
+              <a:schemeClr val="tx1">
+                <a:lumMod val="50000"/>
+                <a:lumOff val="50000"/>
+              </a:schemeClr>
+            </a:solidFill>
+            <a:tailEnd type="triangle"/>
+          </a:ln>
+        </p:spPr>
+        <p:style>
+          <a:lnRef idx="1">
+            <a:schemeClr val="accent1"/>
+          </a:lnRef>
+          <a:fillRef idx="0">
+            <a:schemeClr val="accent1"/>
+          </a:fillRef>
+          <a:effectRef idx="0">
+            <a:schemeClr val="accent1"/>
+          </a:effectRef>
+          <a:fontRef idx="minor">
+            <a:schemeClr val="tx1"/>
+          </a:fontRef>
+        </p:style>
+      </p:cxnSp>
+      <p:sp>
+        <p:nvSpPr>
+          <p:cNvPr id="21" name="Circular Arrow 20">
+            <a:extLst>
+              <a:ext uri="{FF2B5EF4-FFF2-40B4-BE49-F238E27FC236}">
+                <a16:creationId xmlns:a16="http://schemas.microsoft.com/office/drawing/2014/main" id="{A4BF2102-64CD-074C-BB48-26F949FD6FD4}"/>
+              </a:ext>
+            </a:extLst>
+          </p:cNvPr>
+          <p:cNvSpPr/>
+          <p:nvPr/>
+        </p:nvSpPr>
+        <p:spPr>
+          <a:xfrm rot="5400000">
+            <a:off x="4569477" y="3634817"/>
+            <a:ext cx="1914038" cy="2100391"/>
+          </a:xfrm>
+          <a:prstGeom prst="circularArrow">
+            <a:avLst/>
+          </a:prstGeom>
+          <a:solidFill>
+            <a:schemeClr val="tx1">
+              <a:lumMod val="50000"/>
+              <a:lumOff val="50000"/>
+            </a:schemeClr>
+          </a:solidFill>
+          <a:ln w="0">
+            <a:solidFill>
+              <a:schemeClr val="bg1">
+                <a:lumMod val="50000"/>
+              </a:schemeClr>
+            </a:solidFill>
+          </a:ln>
+        </p:spPr>
+        <p:style>
+          <a:lnRef idx="2">
+            <a:schemeClr val="accent1">
+              <a:shade val="50000"/>
+            </a:schemeClr>
+          </a:lnRef>
+          <a:fillRef idx="1">
+            <a:schemeClr val="accent1"/>
+          </a:fillRef>
+          <a:effectRef idx="0">
+            <a:schemeClr val="accent1"/>
+          </a:effectRef>
+          <a:fontRef idx="minor">
+            <a:schemeClr val="lt1"/>
+          </a:fontRef>
+        </p:style>
+        <p:txBody>
+          <a:bodyPr rtlCol="0" anchor="ctr"/>
+          <a:lstStyle/>
+          <a:p>
+            <a:pPr algn="ctr"/>
+            <a:endParaRPr lang="en-US">
+              <a:solidFill>
+                <a:schemeClr val="tx1"/>
+              </a:solidFill>
+            </a:endParaRPr>
+          </a:p>
+        </p:txBody>
+      </p:sp>
+      <p:sp>
+        <p:nvSpPr>
+          <p:cNvPr id="22" name="Circular Arrow 21">
+            <a:extLst>
+              <a:ext uri="{FF2B5EF4-FFF2-40B4-BE49-F238E27FC236}">
+                <a16:creationId xmlns:a16="http://schemas.microsoft.com/office/drawing/2014/main" id="{185A91F7-F176-7542-BC15-9B72EA0C6500}"/>
+              </a:ext>
+            </a:extLst>
+          </p:cNvPr>
+          <p:cNvSpPr/>
+          <p:nvPr/>
+        </p:nvSpPr>
+        <p:spPr>
+          <a:xfrm rot="16200000">
+            <a:off x="1687760" y="3687553"/>
+            <a:ext cx="1914038" cy="2100391"/>
+          </a:xfrm>
+          <a:prstGeom prst="circularArrow">
+            <a:avLst/>
+          </a:prstGeom>
+          <a:solidFill>
+            <a:schemeClr val="bg1">
+              <a:lumMod val="50000"/>
+            </a:schemeClr>
+          </a:solidFill>
+          <a:ln w="0">
+            <a:solidFill>
+              <a:schemeClr val="tx1">
+                <a:lumMod val="50000"/>
+                <a:lumOff val="50000"/>
+              </a:schemeClr>
+            </a:solidFill>
+          </a:ln>
+        </p:spPr>
+        <p:style>
+          <a:lnRef idx="2">
+            <a:schemeClr val="accent1">
+              <a:shade val="50000"/>
+            </a:schemeClr>
+          </a:lnRef>
+          <a:fillRef idx="1">
+            <a:schemeClr val="accent1"/>
+          </a:fillRef>
+          <a:effectRef idx="0">
+            <a:schemeClr val="accent1"/>
+          </a:effectRef>
+          <a:fontRef idx="minor">
+            <a:schemeClr val="lt1"/>
+          </a:fontRef>
+        </p:style>
+        <p:txBody>
+          <a:bodyPr rtlCol="0" anchor="ctr"/>
+          <a:lstStyle/>
+          <a:p>
+            <a:pPr algn="ctr"/>
+            <a:endParaRPr lang="en-US">
+              <a:solidFill>
+                <a:schemeClr val="tx1"/>
+              </a:solidFill>
+            </a:endParaRPr>
+          </a:p>
+        </p:txBody>
+      </p:sp>
+      <p:sp>
+        <p:nvSpPr>
+          <p:cNvPr id="23" name="TextBox 22">
+            <a:extLst>
+              <a:ext uri="{FF2B5EF4-FFF2-40B4-BE49-F238E27FC236}">
+                <a16:creationId xmlns:a16="http://schemas.microsoft.com/office/drawing/2014/main" id="{711C4F67-6C74-3A47-A072-2AB85A0C8CBD}"/>
+              </a:ext>
+            </a:extLst>
+          </p:cNvPr>
+          <p:cNvSpPr txBox="1"/>
+          <p:nvPr/>
+        </p:nvSpPr>
+        <p:spPr>
+          <a:xfrm>
+            <a:off x="2744821" y="5129112"/>
+            <a:ext cx="2749672" cy="1200329"/>
+          </a:xfrm>
+          <a:prstGeom prst="rect">
+            <a:avLst/>
+          </a:prstGeom>
+          <a:noFill/>
+          <a:ln w="31750">
+            <a:solidFill>
+              <a:schemeClr val="accent1">
+                <a:shade val="50000"/>
+              </a:schemeClr>
+            </a:solidFill>
+          </a:ln>
+        </p:spPr>
+        <p:txBody>
+          <a:bodyPr wrap="square" rtlCol="0">
+            <a:spAutoFit/>
+          </a:bodyPr>
+          <a:lstStyle/>
+          <a:p>
+            <a:pPr algn="ctr"/>
+            <a:r>
+              <a:rPr lang="en-US" sz="2600" dirty="0">
+                <a:latin typeface="Helvetica Light" panose="020B0403020202020204" pitchFamily="34" charset="0"/>
+              </a:rPr>
+              <a:t>Do something</a:t>
+            </a:r>
+          </a:p>
+          <a:p>
+            <a:pPr algn="ctr"/>
+            <a:r>
+              <a:rPr lang="en-US" sz="2300" dirty="0">
+                <a:latin typeface="Helvetica Light" panose="020B0403020202020204" pitchFamily="34" charset="0"/>
+              </a:rPr>
+              <a:t>(exit loop when nothing left to do)</a:t>
+            </a:r>
+          </a:p>
+        </p:txBody>
+      </p:sp>
+      <p:sp>
+        <p:nvSpPr>
+          <p:cNvPr id="24" name="Rectangle 23">
+            <a:extLst>
+              <a:ext uri="{FF2B5EF4-FFF2-40B4-BE49-F238E27FC236}">
+                <a16:creationId xmlns:a16="http://schemas.microsoft.com/office/drawing/2014/main" id="{194DEB45-FD0B-5B40-9BBD-7C8467FD63AC}"/>
+              </a:ext>
+            </a:extLst>
+          </p:cNvPr>
+          <p:cNvSpPr/>
+          <p:nvPr/>
+        </p:nvSpPr>
+        <p:spPr>
+          <a:xfrm>
+            <a:off x="2886157" y="453098"/>
+            <a:ext cx="7892434" cy="677108"/>
+          </a:xfrm>
+          <a:prstGeom prst="rect">
+            <a:avLst/>
+          </a:prstGeom>
+        </p:spPr>
+        <p:txBody>
+          <a:bodyPr wrap="square">
+            <a:spAutoFit/>
+          </a:bodyPr>
+          <a:lstStyle/>
+          <a:p>
+            <a:r>
+              <a:rPr lang="en-US" sz="3800" b="1" dirty="0">
+                <a:latin typeface="Helvetica Light" panose="020B0403020202020204" pitchFamily="34" charset="0"/>
+              </a:rPr>
+              <a:t>while</a:t>
+            </a:r>
+            <a:r>
+              <a:rPr lang="en-US" sz="3200" b="1" dirty="0">
+                <a:latin typeface="Helvetica Light" panose="020B0403020202020204" pitchFamily="34" charset="0"/>
+              </a:rPr>
+              <a:t>	</a:t>
+            </a:r>
+            <a:r>
+              <a:rPr lang="en-US" sz="3200" dirty="0">
+                <a:latin typeface="Helvetica Light" panose="020B0403020202020204" pitchFamily="34" charset="0"/>
+              </a:rPr>
+              <a:t>iterative loop</a:t>
+            </a:r>
+            <a:r>
+              <a:rPr lang="en-US" sz="3200" b="1" dirty="0">
+                <a:latin typeface="Helvetica Light" panose="020B0403020202020204" pitchFamily="34" charset="0"/>
+              </a:rPr>
+              <a:t>	</a:t>
             </a:r>
           </a:p>
         </p:txBody>
@@ -10458,13 +10413,91 @@
     </p:spTree>
     <p:extLst>
       <p:ext uri="{BB962C8B-B14F-4D97-AF65-F5344CB8AC3E}">
-        <p14:creationId xmlns:p14="http://schemas.microsoft.com/office/powerpoint/2010/main" val="511004322"/>
+        <p14:creationId xmlns:p14="http://schemas.microsoft.com/office/powerpoint/2010/main" val="2874074153"/>
       </p:ext>
     </p:extLst>
   </p:cSld>
   <p:clrMapOvr>
     <a:masterClrMapping/>
   </p:clrMapOvr>
+  <p:timing>
+    <p:tnLst>
+      <p:par>
+        <p:cTn id="1" dur="indefinite" restart="never" nodeType="tmRoot">
+          <p:childTnLst>
+            <p:seq concurrent="1" nextAc="seek">
+              <p:cTn id="2" dur="indefinite" nodeType="mainSeq">
+                <p:childTnLst>
+                  <p:par>
+                    <p:cTn id="3" fill="hold">
+                      <p:stCondLst>
+                        <p:cond delay="indefinite"/>
+                      </p:stCondLst>
+                      <p:childTnLst>
+                        <p:par>
+                          <p:cTn id="4" fill="hold">
+                            <p:stCondLst>
+                              <p:cond delay="0"/>
+                            </p:stCondLst>
+                            <p:childTnLst>
+                              <p:par>
+                                <p:cTn id="5" presetID="1" presetClass="entr" presetSubtype="0" fill="hold" grpId="0" nodeType="clickEffect">
+                                  <p:stCondLst>
+                                    <p:cond delay="0"/>
+                                  </p:stCondLst>
+                                  <p:childTnLst>
+                                    <p:set>
+                                      <p:cBhvr>
+                                        <p:cTn id="6" dur="1" fill="hold">
+                                          <p:stCondLst>
+                                            <p:cond delay="0"/>
+                                          </p:stCondLst>
+                                        </p:cTn>
+                                        <p:tgtEl>
+                                          <p:spTgt spid="3"/>
+                                        </p:tgtEl>
+                                        <p:attrNameLst>
+                                          <p:attrName>style.visibility</p:attrName>
+                                        </p:attrNameLst>
+                                      </p:cBhvr>
+                                      <p:to>
+                                        <p:strVal val="visible"/>
+                                      </p:to>
+                                    </p:set>
+                                  </p:childTnLst>
+                                </p:cTn>
+                              </p:par>
+                            </p:childTnLst>
+                          </p:cTn>
+                        </p:par>
+                      </p:childTnLst>
+                    </p:cTn>
+                  </p:par>
+                </p:childTnLst>
+              </p:cTn>
+              <p:prevCondLst>
+                <p:cond evt="onPrev" delay="0">
+                  <p:tgtEl>
+                    <p:sldTgt/>
+                  </p:tgtEl>
+                </p:cond>
+              </p:prevCondLst>
+              <p:nextCondLst>
+                <p:cond evt="onNext" delay="0">
+                  <p:tgtEl>
+                    <p:sldTgt/>
+                  </p:tgtEl>
+                </p:cond>
+              </p:nextCondLst>
+            </p:seq>
+          </p:childTnLst>
+        </p:cTn>
+      </p:par>
+    </p:tnLst>
+    <p:bldLst>
+      <p:bldP spid="3" grpId="0"/>
+    </p:bldLst>
+  </p:timing>
 </p:sld>
 </file>
 
@@ -11011,6 +11044,235 @@
           <p:cNvPr id="2" name="TextBox 1">
             <a:extLst>
               <a:ext uri="{FF2B5EF4-FFF2-40B4-BE49-F238E27FC236}">
+                <a16:creationId xmlns:a16="http://schemas.microsoft.com/office/drawing/2014/main" id="{3712C3A7-9D04-7D4D-8D49-C10A93131485}"/>
+              </a:ext>
+            </a:extLst>
+          </p:cNvPr>
+          <p:cNvSpPr txBox="1"/>
+          <p:nvPr/>
+        </p:nvSpPr>
+        <p:spPr>
+          <a:xfrm>
+            <a:off x="4277162" y="678878"/>
+            <a:ext cx="2534668" cy="600164"/>
+          </a:xfrm>
+          <a:prstGeom prst="rect">
+            <a:avLst/>
+          </a:prstGeom>
+          <a:noFill/>
+        </p:spPr>
+        <p:txBody>
+          <a:bodyPr wrap="none" rtlCol="0">
+            <a:spAutoFit/>
+          </a:bodyPr>
+          <a:lstStyle/>
+          <a:p>
+            <a:r>
+              <a:rPr lang="en-US" sz="3300" dirty="0" err="1">
+                <a:latin typeface="Helvetica Light" panose="020B0403020202020204" pitchFamily="34" charset="0"/>
+              </a:rPr>
+              <a:t>Input/Output</a:t>
+            </a:r>
+            <a:endParaRPr lang="en-US" sz="3300" dirty="0">
+              <a:latin typeface="Helvetica Light" panose="020B0403020202020204" pitchFamily="34" charset="0"/>
+            </a:endParaRPr>
+          </a:p>
+        </p:txBody>
+      </p:sp>
+      <p:sp>
+        <p:nvSpPr>
+          <p:cNvPr id="3" name="TextBox 2">
+            <a:extLst>
+              <a:ext uri="{FF2B5EF4-FFF2-40B4-BE49-F238E27FC236}">
+                <a16:creationId xmlns:a16="http://schemas.microsoft.com/office/drawing/2014/main" id="{3AA4CEF9-8B7D-AC4A-842B-E210353E36AC}"/>
+              </a:ext>
+            </a:extLst>
+          </p:cNvPr>
+          <p:cNvSpPr txBox="1"/>
+          <p:nvPr/>
+        </p:nvSpPr>
+        <p:spPr>
+          <a:xfrm>
+            <a:off x="772998" y="1923068"/>
+            <a:ext cx="10796545" cy="461665"/>
+          </a:xfrm>
+          <a:prstGeom prst="rect">
+            <a:avLst/>
+          </a:prstGeom>
+          <a:noFill/>
+        </p:spPr>
+        <p:txBody>
+          <a:bodyPr wrap="none" rtlCol="0">
+            <a:spAutoFit/>
+          </a:bodyPr>
+          <a:lstStyle/>
+          <a:p>
+            <a:r>
+              <a:rPr lang="en-US" sz="2400" dirty="0">
+                <a:latin typeface="Helvetica Light" panose="020B0403020202020204" pitchFamily="34" charset="0"/>
+              </a:rPr>
+              <a:t>- Nearly always, your programs will </a:t>
+            </a:r>
+            <a:r>
+              <a:rPr lang="en-US" sz="2400" b="1" dirty="0">
+                <a:latin typeface="Helvetica Light" panose="020B0403020202020204" pitchFamily="34" charset="0"/>
+              </a:rPr>
+              <a:t>process</a:t>
+            </a:r>
+            <a:r>
+              <a:rPr lang="en-US" sz="2400" dirty="0">
+                <a:latin typeface="Helvetica Light" panose="020B0403020202020204" pitchFamily="34" charset="0"/>
+              </a:rPr>
+              <a:t> information </a:t>
+            </a:r>
+            <a:r>
+              <a:rPr lang="en-US" sz="2400" b="1" dirty="0">
+                <a:latin typeface="Helvetica Light" panose="020B0403020202020204" pitchFamily="34" charset="0"/>
+              </a:rPr>
+              <a:t>from</a:t>
+            </a:r>
+            <a:r>
+              <a:rPr lang="en-US" sz="2400" dirty="0">
+                <a:latin typeface="Helvetica Light" panose="020B0403020202020204" pitchFamily="34" charset="0"/>
+              </a:rPr>
+              <a:t> files you specify</a:t>
+            </a:r>
+          </a:p>
+        </p:txBody>
+      </p:sp>
+      <p:sp>
+        <p:nvSpPr>
+          <p:cNvPr id="4" name="TextBox 3">
+            <a:extLst>
+              <a:ext uri="{FF2B5EF4-FFF2-40B4-BE49-F238E27FC236}">
+                <a16:creationId xmlns:a16="http://schemas.microsoft.com/office/drawing/2014/main" id="{813D4770-6C50-644C-B0CF-470988DE7D1D}"/>
+              </a:ext>
+            </a:extLst>
+          </p:cNvPr>
+          <p:cNvSpPr txBox="1"/>
+          <p:nvPr/>
+        </p:nvSpPr>
+        <p:spPr>
+          <a:xfrm>
+            <a:off x="772998" y="3429000"/>
+            <a:ext cx="9975808" cy="461665"/>
+          </a:xfrm>
+          <a:prstGeom prst="rect">
+            <a:avLst/>
+          </a:prstGeom>
+          <a:noFill/>
+        </p:spPr>
+        <p:txBody>
+          <a:bodyPr wrap="none" rtlCol="0">
+            <a:spAutoFit/>
+          </a:bodyPr>
+          <a:lstStyle/>
+          <a:p>
+            <a:r>
+              <a:rPr lang="en-US" sz="2400" dirty="0">
+                <a:latin typeface="Helvetica Light" panose="020B0403020202020204" pitchFamily="34" charset="0"/>
+              </a:rPr>
+              <a:t>- Nearly always, your programs will </a:t>
+            </a:r>
+            <a:r>
+              <a:rPr lang="en-US" sz="2400" b="1" dirty="0">
+                <a:latin typeface="Helvetica Light" panose="020B0403020202020204" pitchFamily="34" charset="0"/>
+              </a:rPr>
+              <a:t>write</a:t>
+            </a:r>
+            <a:r>
+              <a:rPr lang="en-US" sz="2400" dirty="0">
+                <a:latin typeface="Helvetica Light" panose="020B0403020202020204" pitchFamily="34" charset="0"/>
+              </a:rPr>
+              <a:t> information </a:t>
+            </a:r>
+            <a:r>
+              <a:rPr lang="en-US" sz="2400" b="1" dirty="0">
+                <a:latin typeface="Helvetica Light" panose="020B0403020202020204" pitchFamily="34" charset="0"/>
+              </a:rPr>
+              <a:t>to</a:t>
+            </a:r>
+            <a:r>
+              <a:rPr lang="en-US" sz="2400" dirty="0">
+                <a:latin typeface="Helvetica Light" panose="020B0403020202020204" pitchFamily="34" charset="0"/>
+              </a:rPr>
+              <a:t> files you specify</a:t>
+            </a:r>
+          </a:p>
+        </p:txBody>
+      </p:sp>
+      <p:sp>
+        <p:nvSpPr>
+          <p:cNvPr id="6" name="TextBox 5">
+            <a:extLst>
+              <a:ext uri="{FF2B5EF4-FFF2-40B4-BE49-F238E27FC236}">
+                <a16:creationId xmlns:a16="http://schemas.microsoft.com/office/drawing/2014/main" id="{D40E54A4-CE4D-2A4B-A94A-DBCDD423FDF2}"/>
+              </a:ext>
+            </a:extLst>
+          </p:cNvPr>
+          <p:cNvSpPr txBox="1"/>
+          <p:nvPr/>
+        </p:nvSpPr>
+        <p:spPr>
+          <a:xfrm>
+            <a:off x="772998" y="4657125"/>
+            <a:ext cx="11203215" cy="830997"/>
+          </a:xfrm>
+          <a:prstGeom prst="rect">
+            <a:avLst/>
+          </a:prstGeom>
+          <a:noFill/>
+        </p:spPr>
+        <p:txBody>
+          <a:bodyPr wrap="square" rtlCol="0">
+            <a:spAutoFit/>
+          </a:bodyPr>
+          <a:lstStyle/>
+          <a:p>
+            <a:r>
+              <a:rPr lang="en-US" sz="2400" dirty="0">
+                <a:latin typeface="Helvetica Light" panose="020B0403020202020204" pitchFamily="34" charset="0"/>
+              </a:rPr>
+              <a:t>- Sometimes this will involve one file at a time; often it will involve many (which can be just as easy) </a:t>
+            </a:r>
+          </a:p>
+        </p:txBody>
+      </p:sp>
+    </p:spTree>
+    <p:extLst>
+      <p:ext uri="{BB962C8B-B14F-4D97-AF65-F5344CB8AC3E}">
+        <p14:creationId xmlns:p14="http://schemas.microsoft.com/office/powerpoint/2010/main" val="511004322"/>
+      </p:ext>
+    </p:extLst>
+  </p:cSld>
+  <p:clrMapOvr>
+    <a:masterClrMapping/>
+  </p:clrMapOvr>
+</p:sld>
+</file>
+
+<file path=ppt/slides/slide21.xml><?xml version="1.0" encoding="utf-8"?>
+<p:sld xmlns:a="http://schemas.openxmlformats.org/drawingml/2006/main" xmlns:r="http://schemas.openxmlformats.org/officeDocument/2006/relationships" xmlns:p="http://schemas.openxmlformats.org/presentationml/2006/main">
+  <p:cSld>
+    <p:spTree>
+      <p:nvGrpSpPr>
+        <p:cNvPr id="1" name=""/>
+        <p:cNvGrpSpPr/>
+        <p:nvPr/>
+      </p:nvGrpSpPr>
+      <p:grpSpPr>
+        <a:xfrm>
+          <a:off x="0" y="0"/>
+          <a:ext cx="0" cy="0"/>
+          <a:chOff x="0" y="0"/>
+          <a:chExt cx="0" cy="0"/>
+        </a:xfrm>
+      </p:grpSpPr>
+      <p:sp>
+        <p:nvSpPr>
+          <p:cNvPr id="2" name="TextBox 1">
+            <a:extLst>
+              <a:ext uri="{FF2B5EF4-FFF2-40B4-BE49-F238E27FC236}">
                 <a16:creationId xmlns:a16="http://schemas.microsoft.com/office/drawing/2014/main" id="{ECEC7FB8-F28C-3049-9D95-317AA02DF52B}"/>
               </a:ext>
             </a:extLst>
@@ -11617,268 +11879,6 @@
 </p:sld>
 </file>
 
-<file path=ppt/slides/slide21.xml><?xml version="1.0" encoding="utf-8"?>
-<p:sld xmlns:a="http://schemas.openxmlformats.org/drawingml/2006/main" xmlns:r="http://schemas.openxmlformats.org/officeDocument/2006/relationships" xmlns:p="http://schemas.openxmlformats.org/presentationml/2006/main">
-  <p:cSld>
-    <p:spTree>
-      <p:nvGrpSpPr>
-        <p:cNvPr id="1" name=""/>
-        <p:cNvGrpSpPr/>
-        <p:nvPr/>
-      </p:nvGrpSpPr>
-      <p:grpSpPr>
-        <a:xfrm>
-          <a:off x="0" y="0"/>
-          <a:ext cx="0" cy="0"/>
-          <a:chOff x="0" y="0"/>
-          <a:chExt cx="0" cy="0"/>
-        </a:xfrm>
-      </p:grpSpPr>
-      <p:sp>
-        <p:nvSpPr>
-          <p:cNvPr id="2" name="TextBox 1">
-            <a:extLst>
-              <a:ext uri="{FF2B5EF4-FFF2-40B4-BE49-F238E27FC236}">
-                <a16:creationId xmlns:a16="http://schemas.microsoft.com/office/drawing/2014/main" id="{B3220B4F-105B-954F-BF7B-F3FB31A67296}"/>
-              </a:ext>
-            </a:extLst>
-          </p:cNvPr>
-          <p:cNvSpPr txBox="1"/>
-          <p:nvPr/>
-        </p:nvSpPr>
-        <p:spPr>
-          <a:xfrm>
-            <a:off x="981432" y="626914"/>
-            <a:ext cx="2553904" cy="584775"/>
-          </a:xfrm>
-          <a:prstGeom prst="rect">
-            <a:avLst/>
-          </a:prstGeom>
-          <a:noFill/>
-        </p:spPr>
-        <p:txBody>
-          <a:bodyPr wrap="none" rtlCol="0">
-            <a:spAutoFit/>
-          </a:bodyPr>
-          <a:lstStyle/>
-          <a:p>
-            <a:r>
-              <a:rPr lang="en-US" sz="3200" dirty="0">
-                <a:latin typeface="Helvetica Light" panose="020B0403020202020204" pitchFamily="34" charset="0"/>
-              </a:rPr>
-              <a:t>Why Python?</a:t>
-            </a:r>
-          </a:p>
-        </p:txBody>
-      </p:sp>
-      <p:sp>
-        <p:nvSpPr>
-          <p:cNvPr id="4" name="TextBox 3">
-            <a:extLst>
-              <a:ext uri="{FF2B5EF4-FFF2-40B4-BE49-F238E27FC236}">
-                <a16:creationId xmlns:a16="http://schemas.microsoft.com/office/drawing/2014/main" id="{F8605A53-5305-5D45-82E7-85A901F3E3AB}"/>
-              </a:ext>
-            </a:extLst>
-          </p:cNvPr>
-          <p:cNvSpPr txBox="1"/>
-          <p:nvPr/>
-        </p:nvSpPr>
-        <p:spPr>
-          <a:xfrm>
-            <a:off x="958607" y="1616119"/>
-            <a:ext cx="10912410" cy="800219"/>
-          </a:xfrm>
-          <a:prstGeom prst="rect">
-            <a:avLst/>
-          </a:prstGeom>
-          <a:noFill/>
-        </p:spPr>
-        <p:txBody>
-          <a:bodyPr wrap="square" rtlCol="0">
-            <a:spAutoFit/>
-          </a:bodyPr>
-          <a:lstStyle/>
-          <a:p>
-            <a:r>
-              <a:rPr lang="en-US" sz="2300" dirty="0">
-                <a:latin typeface="Helvetica Light" panose="020B0403020202020204" pitchFamily="34" charset="0"/>
-              </a:rPr>
-              <a:t>- It is one of the most common languages used in biology and other sciences. 	</a:t>
-            </a:r>
-            <a:r>
-              <a:rPr lang="en-US" sz="2300" dirty="0">
-                <a:effectLst/>
-                <a:latin typeface="Helvetica Light" panose="020B0403020202020204" pitchFamily="34" charset="0"/>
-              </a:rPr>
-              <a:t>Thus, you will find a lot of documentation and examples online.</a:t>
-            </a:r>
-          </a:p>
-        </p:txBody>
-      </p:sp>
-      <p:sp>
-        <p:nvSpPr>
-          <p:cNvPr id="5" name="TextBox 4">
-            <a:extLst>
-              <a:ext uri="{FF2B5EF4-FFF2-40B4-BE49-F238E27FC236}">
-                <a16:creationId xmlns:a16="http://schemas.microsoft.com/office/drawing/2014/main" id="{6E10BFB6-0132-9E43-8181-94CB34A19F8D}"/>
-              </a:ext>
-            </a:extLst>
-          </p:cNvPr>
-          <p:cNvSpPr txBox="1"/>
-          <p:nvPr/>
-        </p:nvSpPr>
-        <p:spPr>
-          <a:xfrm>
-            <a:off x="958601" y="2880403"/>
-            <a:ext cx="11138987" cy="461665"/>
-          </a:xfrm>
-          <a:prstGeom prst="rect">
-            <a:avLst/>
-          </a:prstGeom>
-          <a:noFill/>
-        </p:spPr>
-        <p:txBody>
-          <a:bodyPr wrap="square" rtlCol="0">
-            <a:spAutoFit/>
-          </a:bodyPr>
-          <a:lstStyle/>
-          <a:p>
-            <a:r>
-              <a:rPr lang="en-US" sz="2300" dirty="0">
-                <a:effectLst/>
-                <a:latin typeface="Helvetica Light" panose="020B0403020202020204" pitchFamily="34" charset="0"/>
-              </a:rPr>
-              <a:t>- Excellent for text manipulation, well suited to bioinformatics and data science.</a:t>
-            </a:r>
-          </a:p>
-        </p:txBody>
-      </p:sp>
-      <p:sp>
-        <p:nvSpPr>
-          <p:cNvPr id="7" name="TextBox 6">
-            <a:extLst>
-              <a:ext uri="{FF2B5EF4-FFF2-40B4-BE49-F238E27FC236}">
-                <a16:creationId xmlns:a16="http://schemas.microsoft.com/office/drawing/2014/main" id="{4C046FC5-BED7-3342-A952-AFD3B74529F5}"/>
-              </a:ext>
-            </a:extLst>
-          </p:cNvPr>
-          <p:cNvSpPr txBox="1"/>
-          <p:nvPr/>
-        </p:nvSpPr>
-        <p:spPr>
-          <a:xfrm>
-            <a:off x="958603" y="3805918"/>
-            <a:ext cx="11138987" cy="446276"/>
-          </a:xfrm>
-          <a:prstGeom prst="rect">
-            <a:avLst/>
-          </a:prstGeom>
-          <a:noFill/>
-        </p:spPr>
-        <p:txBody>
-          <a:bodyPr wrap="square" rtlCol="0">
-            <a:spAutoFit/>
-          </a:bodyPr>
-          <a:lstStyle/>
-          <a:p>
-            <a:r>
-              <a:rPr lang="en-US" sz="2300" dirty="0">
-                <a:effectLst/>
-                <a:latin typeface="Helvetica Light" panose="020B0403020202020204" pitchFamily="34" charset="0"/>
-              </a:rPr>
-              <a:t>- It uses consistent syntax, which makes learning specific code relatively easy.</a:t>
-            </a:r>
-          </a:p>
-        </p:txBody>
-      </p:sp>
-      <p:sp>
-        <p:nvSpPr>
-          <p:cNvPr id="8" name="TextBox 7">
-            <a:extLst>
-              <a:ext uri="{FF2B5EF4-FFF2-40B4-BE49-F238E27FC236}">
-                <a16:creationId xmlns:a16="http://schemas.microsoft.com/office/drawing/2014/main" id="{8F050B2A-B383-6741-ACA7-DD2066A31AA2}"/>
-              </a:ext>
-            </a:extLst>
-          </p:cNvPr>
-          <p:cNvSpPr txBox="1"/>
-          <p:nvPr/>
-        </p:nvSpPr>
-        <p:spPr>
-          <a:xfrm>
-            <a:off x="981432" y="4703537"/>
-            <a:ext cx="11138987" cy="461665"/>
-          </a:xfrm>
-          <a:prstGeom prst="rect">
-            <a:avLst/>
-          </a:prstGeom>
-          <a:noFill/>
-        </p:spPr>
-        <p:txBody>
-          <a:bodyPr wrap="square" rtlCol="0">
-            <a:spAutoFit/>
-          </a:bodyPr>
-          <a:lstStyle/>
-          <a:p>
-            <a:r>
-              <a:rPr lang="en-US" sz="2300" dirty="0">
-                <a:effectLst/>
-                <a:latin typeface="Helvetica Light" panose="020B0403020202020204" pitchFamily="34" charset="0"/>
-              </a:rPr>
-              <a:t>- Many built-in libraries/functions to facilitate common tasks</a:t>
-            </a:r>
-          </a:p>
-        </p:txBody>
-      </p:sp>
-      <p:sp>
-        <p:nvSpPr>
-          <p:cNvPr id="9" name="TextBox 8">
-            <a:extLst>
-              <a:ext uri="{FF2B5EF4-FFF2-40B4-BE49-F238E27FC236}">
-                <a16:creationId xmlns:a16="http://schemas.microsoft.com/office/drawing/2014/main" id="{BF472F9E-EDF9-9044-97C0-476E2277DD5E}"/>
-              </a:ext>
-            </a:extLst>
-          </p:cNvPr>
-          <p:cNvSpPr txBox="1"/>
-          <p:nvPr/>
-        </p:nvSpPr>
-        <p:spPr>
-          <a:xfrm>
-            <a:off x="981432" y="5613663"/>
-            <a:ext cx="6024406" cy="446276"/>
-          </a:xfrm>
-          <a:prstGeom prst="rect">
-            <a:avLst/>
-          </a:prstGeom>
-          <a:noFill/>
-        </p:spPr>
-        <p:txBody>
-          <a:bodyPr wrap="none" rtlCol="0">
-            <a:spAutoFit/>
-          </a:bodyPr>
-          <a:lstStyle/>
-          <a:p>
-            <a:r>
-              <a:rPr lang="en-US" sz="2300" dirty="0">
-                <a:latin typeface="Helvetica Light" panose="020B0403020202020204" pitchFamily="34" charset="0"/>
-              </a:rPr>
-              <a:t>- Widely used, across science and industry. </a:t>
-            </a:r>
-          </a:p>
-        </p:txBody>
-      </p:sp>
-    </p:spTree>
-    <p:extLst>
-      <p:ext uri="{BB962C8B-B14F-4D97-AF65-F5344CB8AC3E}">
-        <p14:creationId xmlns:p14="http://schemas.microsoft.com/office/powerpoint/2010/main" val="493156288"/>
-      </p:ext>
-    </p:extLst>
-  </p:cSld>
-  <p:clrMapOvr>
-    <a:masterClrMapping/>
-  </p:clrMapOvr>
-</p:sld>
-</file>
-
 <file path=ppt/slides/slide22.xml><?xml version="1.0" encoding="utf-8"?>
 <p:sld xmlns:a="http://schemas.openxmlformats.org/drawingml/2006/main" xmlns:r="http://schemas.openxmlformats.org/officeDocument/2006/relationships" xmlns:p="http://schemas.openxmlformats.org/presentationml/2006/main">
   <p:cSld>
@@ -11901,7 +11901,7 @@
           <p:cNvPr id="2" name="TextBox 1">
             <a:extLst>
               <a:ext uri="{FF2B5EF4-FFF2-40B4-BE49-F238E27FC236}">
-                <a16:creationId xmlns:a16="http://schemas.microsoft.com/office/drawing/2014/main" id="{13C19098-BCF8-7F47-9A53-B988D35650AB}"/>
+                <a16:creationId xmlns:a16="http://schemas.microsoft.com/office/drawing/2014/main" id="{B3220B4F-105B-954F-BF7B-F3FB31A67296}"/>
               </a:ext>
             </a:extLst>
           </p:cNvPr>
@@ -11910,8 +11910,8 @@
         </p:nvSpPr>
         <p:spPr>
           <a:xfrm>
-            <a:off x="544223" y="609655"/>
-            <a:ext cx="3584636" cy="584775"/>
+            <a:off x="981432" y="626914"/>
+            <a:ext cx="2553904" cy="584775"/>
           </a:xfrm>
           <a:prstGeom prst="rect">
             <a:avLst/>
@@ -11925,20 +11925,20 @@
           <a:lstStyle/>
           <a:p>
             <a:r>
-              <a:rPr lang="en-US" sz="3200" b="1" dirty="0">
-                <a:latin typeface="Helvetica Light" panose="020B0403020202020204" pitchFamily="34" charset="0"/>
-              </a:rPr>
-              <a:t>Before next week:</a:t>
-            </a:r>
-          </a:p>
-        </p:txBody>
-      </p:sp>
-      <p:sp>
-        <p:nvSpPr>
-          <p:cNvPr id="3" name="TextBox 2">
-            <a:extLst>
-              <a:ext uri="{FF2B5EF4-FFF2-40B4-BE49-F238E27FC236}">
-                <a16:creationId xmlns:a16="http://schemas.microsoft.com/office/drawing/2014/main" id="{75194C2E-1163-644D-9D6E-D89FA9A5C7CF}"/>
+              <a:rPr lang="en-US" sz="3200" dirty="0">
+                <a:latin typeface="Helvetica Light" panose="020B0403020202020204" pitchFamily="34" charset="0"/>
+              </a:rPr>
+              <a:t>Why Python?</a:t>
+            </a:r>
+          </a:p>
+        </p:txBody>
+      </p:sp>
+      <p:sp>
+        <p:nvSpPr>
+          <p:cNvPr id="4" name="TextBox 3">
+            <a:extLst>
+              <a:ext uri="{FF2B5EF4-FFF2-40B4-BE49-F238E27FC236}">
+                <a16:creationId xmlns:a16="http://schemas.microsoft.com/office/drawing/2014/main" id="{F8605A53-5305-5D45-82E7-85A901F3E3AB}"/>
               </a:ext>
             </a:extLst>
           </p:cNvPr>
@@ -11947,8 +11947,8 @@
         </p:nvSpPr>
         <p:spPr>
           <a:xfrm>
-            <a:off x="544223" y="1924084"/>
-            <a:ext cx="11103554" cy="4031873"/>
+            <a:off x="958607" y="1616119"/>
+            <a:ext cx="10912410" cy="800219"/>
           </a:xfrm>
           <a:prstGeom prst="rect">
             <a:avLst/>
@@ -11961,111 +11961,169 @@
           </a:bodyPr>
           <a:lstStyle/>
           <a:p>
-            <a:pPr marL="514350" indent="-514350">
-              <a:buAutoNum type="arabicPeriod"/>
-            </a:pPr>
-            <a:r>
-              <a:rPr lang="en-US" sz="3200" dirty="0">
-                <a:latin typeface="Helvetica Light" panose="020B0403020202020204" pitchFamily="34" charset="0"/>
-              </a:rPr>
-              <a:t>Go through short week5_primer.md</a:t>
-            </a:r>
-          </a:p>
-          <a:p>
-            <a:pPr marL="514350" indent="-514350">
-              <a:buAutoNum type="arabicPeriod"/>
-            </a:pPr>
-            <a:endParaRPr lang="en-US" sz="3200" dirty="0">
-              <a:latin typeface="Helvetica Light" panose="020B0403020202020204" pitchFamily="34" charset="0"/>
-            </a:endParaRPr>
-          </a:p>
-          <a:p>
-            <a:pPr marL="514350" indent="-514350">
-              <a:buAutoNum type="arabicPeriod"/>
-            </a:pPr>
-            <a:r>
-              <a:rPr lang="en-US" sz="3200" dirty="0">
-                <a:latin typeface="Helvetica Light" panose="020B0403020202020204" pitchFamily="34" charset="0"/>
-              </a:rPr>
-              <a:t>Read Chapter 7, Preview Chapter 8</a:t>
-            </a:r>
-          </a:p>
-          <a:p>
-            <a:pPr marL="514350" indent="-514350">
-              <a:buAutoNum type="arabicPeriod"/>
-            </a:pPr>
-            <a:endParaRPr lang="en-US" sz="3200" dirty="0">
-              <a:latin typeface="Helvetica Light" panose="020B0403020202020204" pitchFamily="34" charset="0"/>
-            </a:endParaRPr>
-          </a:p>
-          <a:p>
-            <a:r>
-              <a:rPr lang="en-US" sz="3200" dirty="0">
-                <a:latin typeface="Helvetica Light" panose="020B0403020202020204" pitchFamily="34" charset="0"/>
-              </a:rPr>
-              <a:t>3. Go through </a:t>
-            </a:r>
-            <a:r>
-              <a:rPr lang="en-US" sz="3200" dirty="0" err="1">
-                <a:solidFill>
-                  <a:srgbClr val="121212"/>
-                </a:solidFill>
+            <a:r>
+              <a:rPr lang="en-US" sz="2300" dirty="0">
+                <a:latin typeface="Helvetica Light" panose="020B0403020202020204" pitchFamily="34" charset="0"/>
+              </a:rPr>
+              <a:t>- It is one of the most common languages used in biology and other sciences. 	</a:t>
+            </a:r>
+            <a:r>
+              <a:rPr lang="en-US" sz="2300" dirty="0">
                 <a:effectLst/>
-                <a:latin typeface="Menlo" panose="020B0609030804020204" pitchFamily="49" charset="0"/>
-              </a:rPr>
-              <a:t>jupyter_getting_started.md</a:t>
-            </a:r>
-            <a:r>
-              <a:rPr lang="en-US" sz="3200" dirty="0">
-                <a:solidFill>
-                  <a:srgbClr val="121212"/>
-                </a:solidFill>
-                <a:latin typeface="Menlo" panose="020B0609030804020204" pitchFamily="49" charset="0"/>
-              </a:rPr>
-              <a:t> </a:t>
-            </a:r>
-            <a:r>
-              <a:rPr lang="en-US" sz="3200" dirty="0">
-                <a:solidFill>
-                  <a:srgbClr val="121212"/>
-                </a:solidFill>
-                <a:latin typeface="Helvetica Light" panose="020B0403020202020204" pitchFamily="34" charset="0"/>
-              </a:rPr>
-              <a:t>(under </a:t>
-            </a:r>
-            <a:r>
-              <a:rPr lang="en-US" sz="3200" dirty="0" err="1">
-                <a:solidFill>
-                  <a:srgbClr val="121212"/>
-                </a:solidFill>
-                <a:latin typeface="Helvetica Light" panose="020B0403020202020204" pitchFamily="34" charset="0"/>
-              </a:rPr>
-              <a:t>jupyter_start</a:t>
-            </a:r>
-            <a:r>
-              <a:rPr lang="en-US" sz="3200" dirty="0">
-                <a:solidFill>
-                  <a:srgbClr val="121212"/>
-                </a:solidFill>
-                <a:latin typeface="Helvetica Light" panose="020B0403020202020204" pitchFamily="34" charset="0"/>
-              </a:rPr>
-              <a:t>)</a:t>
-            </a:r>
-            <a:endParaRPr lang="en-US" sz="3200" dirty="0">
-              <a:latin typeface="Helvetica Light" panose="020B0403020202020204" pitchFamily="34" charset="0"/>
-            </a:endParaRPr>
-          </a:p>
-          <a:p>
-            <a:endParaRPr lang="en-US" sz="3200" dirty="0">
-              <a:latin typeface="Helvetica Light" panose="020B0403020202020204" pitchFamily="34" charset="0"/>
-            </a:endParaRPr>
-          </a:p>
-          <a:p>
-            <a:r>
-              <a:rPr lang="en-US" sz="3200" dirty="0">
-                <a:latin typeface="Helvetica Light" panose="020B0403020202020204" pitchFamily="34" charset="0"/>
-              </a:rPr>
-              <a:t>4. Converse about independent project ideas if needed</a:t>
+                <a:latin typeface="Helvetica Light" panose="020B0403020202020204" pitchFamily="34" charset="0"/>
+              </a:rPr>
+              <a:t>Thus, you will find a lot of documentation and examples online.</a:t>
+            </a:r>
+          </a:p>
+        </p:txBody>
+      </p:sp>
+      <p:sp>
+        <p:nvSpPr>
+          <p:cNvPr id="5" name="TextBox 4">
+            <a:extLst>
+              <a:ext uri="{FF2B5EF4-FFF2-40B4-BE49-F238E27FC236}">
+                <a16:creationId xmlns:a16="http://schemas.microsoft.com/office/drawing/2014/main" id="{6E10BFB6-0132-9E43-8181-94CB34A19F8D}"/>
+              </a:ext>
+            </a:extLst>
+          </p:cNvPr>
+          <p:cNvSpPr txBox="1"/>
+          <p:nvPr/>
+        </p:nvSpPr>
+        <p:spPr>
+          <a:xfrm>
+            <a:off x="958601" y="2880403"/>
+            <a:ext cx="11138987" cy="461665"/>
+          </a:xfrm>
+          <a:prstGeom prst="rect">
+            <a:avLst/>
+          </a:prstGeom>
+          <a:noFill/>
+        </p:spPr>
+        <p:txBody>
+          <a:bodyPr wrap="square" rtlCol="0">
+            <a:spAutoFit/>
+          </a:bodyPr>
+          <a:lstStyle/>
+          <a:p>
+            <a:r>
+              <a:rPr lang="en-US" sz="2300" dirty="0">
+                <a:effectLst/>
+                <a:latin typeface="Helvetica Light" panose="020B0403020202020204" pitchFamily="34" charset="0"/>
+              </a:rPr>
+              <a:t>- Excellent for text manipulation, well suited to bioinformatics and data science.</a:t>
+            </a:r>
+          </a:p>
+        </p:txBody>
+      </p:sp>
+      <p:sp>
+        <p:nvSpPr>
+          <p:cNvPr id="7" name="TextBox 6">
+            <a:extLst>
+              <a:ext uri="{FF2B5EF4-FFF2-40B4-BE49-F238E27FC236}">
+                <a16:creationId xmlns:a16="http://schemas.microsoft.com/office/drawing/2014/main" id="{4C046FC5-BED7-3342-A952-AFD3B74529F5}"/>
+              </a:ext>
+            </a:extLst>
+          </p:cNvPr>
+          <p:cNvSpPr txBox="1"/>
+          <p:nvPr/>
+        </p:nvSpPr>
+        <p:spPr>
+          <a:xfrm>
+            <a:off x="958603" y="3805918"/>
+            <a:ext cx="11138987" cy="446276"/>
+          </a:xfrm>
+          <a:prstGeom prst="rect">
+            <a:avLst/>
+          </a:prstGeom>
+          <a:noFill/>
+        </p:spPr>
+        <p:txBody>
+          <a:bodyPr wrap="square" rtlCol="0">
+            <a:spAutoFit/>
+          </a:bodyPr>
+          <a:lstStyle/>
+          <a:p>
+            <a:r>
+              <a:rPr lang="en-US" sz="2300" dirty="0">
+                <a:effectLst/>
+                <a:latin typeface="Helvetica Light" panose="020B0403020202020204" pitchFamily="34" charset="0"/>
+              </a:rPr>
+              <a:t>- It uses consistent syntax, which makes learning specific code relatively easy.</a:t>
+            </a:r>
+          </a:p>
+        </p:txBody>
+      </p:sp>
+      <p:sp>
+        <p:nvSpPr>
+          <p:cNvPr id="8" name="TextBox 7">
+            <a:extLst>
+              <a:ext uri="{FF2B5EF4-FFF2-40B4-BE49-F238E27FC236}">
+                <a16:creationId xmlns:a16="http://schemas.microsoft.com/office/drawing/2014/main" id="{8F050B2A-B383-6741-ACA7-DD2066A31AA2}"/>
+              </a:ext>
+            </a:extLst>
+          </p:cNvPr>
+          <p:cNvSpPr txBox="1"/>
+          <p:nvPr/>
+        </p:nvSpPr>
+        <p:spPr>
+          <a:xfrm>
+            <a:off x="981432" y="4703537"/>
+            <a:ext cx="11138987" cy="461665"/>
+          </a:xfrm>
+          <a:prstGeom prst="rect">
+            <a:avLst/>
+          </a:prstGeom>
+          <a:noFill/>
+        </p:spPr>
+        <p:txBody>
+          <a:bodyPr wrap="square" rtlCol="0">
+            <a:spAutoFit/>
+          </a:bodyPr>
+          <a:lstStyle/>
+          <a:p>
+            <a:r>
+              <a:rPr lang="en-US" sz="2300" dirty="0">
+                <a:effectLst/>
+                <a:latin typeface="Helvetica Light" panose="020B0403020202020204" pitchFamily="34" charset="0"/>
+              </a:rPr>
+              <a:t>- Many built-in libraries/functions to facilitate common tasks</a:t>
+            </a:r>
+          </a:p>
+        </p:txBody>
+      </p:sp>
+      <p:sp>
+        <p:nvSpPr>
+          <p:cNvPr id="9" name="TextBox 8">
+            <a:extLst>
+              <a:ext uri="{FF2B5EF4-FFF2-40B4-BE49-F238E27FC236}">
+                <a16:creationId xmlns:a16="http://schemas.microsoft.com/office/drawing/2014/main" id="{BF472F9E-EDF9-9044-97C0-476E2277DD5E}"/>
+              </a:ext>
+            </a:extLst>
+          </p:cNvPr>
+          <p:cNvSpPr txBox="1"/>
+          <p:nvPr/>
+        </p:nvSpPr>
+        <p:spPr>
+          <a:xfrm>
+            <a:off x="981432" y="5613663"/>
+            <a:ext cx="6024406" cy="446276"/>
+          </a:xfrm>
+          <a:prstGeom prst="rect">
+            <a:avLst/>
+          </a:prstGeom>
+          <a:noFill/>
+        </p:spPr>
+        <p:txBody>
+          <a:bodyPr wrap="none" rtlCol="0">
+            <a:spAutoFit/>
+          </a:bodyPr>
+          <a:lstStyle/>
+          <a:p>
+            <a:r>
+              <a:rPr lang="en-US" sz="2300" dirty="0">
+                <a:latin typeface="Helvetica Light" panose="020B0403020202020204" pitchFamily="34" charset="0"/>
+              </a:rPr>
+              <a:t>- Widely used, across science and industry. </a:t>
             </a:r>
           </a:p>
         </p:txBody>
@@ -12073,7 +12131,7 @@
     </p:spTree>
     <p:extLst>
       <p:ext uri="{BB962C8B-B14F-4D97-AF65-F5344CB8AC3E}">
-        <p14:creationId xmlns:p14="http://schemas.microsoft.com/office/powerpoint/2010/main" val="299710505"/>
+        <p14:creationId xmlns:p14="http://schemas.microsoft.com/office/powerpoint/2010/main" val="493156288"/>
       </p:ext>
     </p:extLst>
   </p:cSld>
@@ -12105,7 +12163,7 @@
           <p:cNvPr id="2" name="TextBox 1">
             <a:extLst>
               <a:ext uri="{FF2B5EF4-FFF2-40B4-BE49-F238E27FC236}">
-                <a16:creationId xmlns:a16="http://schemas.microsoft.com/office/drawing/2014/main" id="{4710A132-F479-7B4D-90DF-92D2042E73B8}"/>
+                <a16:creationId xmlns:a16="http://schemas.microsoft.com/office/drawing/2014/main" id="{13C19098-BCF8-7F47-9A53-B988D35650AB}"/>
               </a:ext>
             </a:extLst>
           </p:cNvPr>
@@ -12114,8 +12172,8 @@
         </p:nvSpPr>
         <p:spPr>
           <a:xfrm>
-            <a:off x="341745" y="840511"/>
-            <a:ext cx="11600873" cy="1015663"/>
+            <a:off x="544223" y="609655"/>
+            <a:ext cx="3584636" cy="584775"/>
           </a:xfrm>
           <a:prstGeom prst="rect">
             <a:avLst/>
@@ -12123,16 +12181,16 @@
           <a:noFill/>
         </p:spPr>
         <p:txBody>
-          <a:bodyPr wrap="square" rtlCol="0">
+          <a:bodyPr wrap="none" rtlCol="0">
             <a:spAutoFit/>
           </a:bodyPr>
           <a:lstStyle/>
           <a:p>
             <a:r>
-              <a:rPr lang="en-US" sz="3000" dirty="0">
-                <a:latin typeface="Helvetica Light" panose="020B0403020202020204" pitchFamily="34" charset="0"/>
-              </a:rPr>
-              <a:t>1. Make sure you have python 3 installed (follow 	week5_primer.md)</a:t>
+              <a:rPr lang="en-US" sz="3200" b="1" dirty="0">
+                <a:latin typeface="Helvetica Light" panose="020B0403020202020204" pitchFamily="34" charset="0"/>
+              </a:rPr>
+              <a:t>Before next week:</a:t>
             </a:r>
           </a:p>
         </p:txBody>
@@ -12142,7 +12200,7 @@
           <p:cNvPr id="3" name="TextBox 2">
             <a:extLst>
               <a:ext uri="{FF2B5EF4-FFF2-40B4-BE49-F238E27FC236}">
-                <a16:creationId xmlns:a16="http://schemas.microsoft.com/office/drawing/2014/main" id="{83DEACCF-7E0D-8A4F-9D6C-B787233F3FA7}"/>
+                <a16:creationId xmlns:a16="http://schemas.microsoft.com/office/drawing/2014/main" id="{75194C2E-1163-644D-9D6E-D89FA9A5C7CF}"/>
               </a:ext>
             </a:extLst>
           </p:cNvPr>
@@ -12151,8 +12209,8 @@
         </p:nvSpPr>
         <p:spPr>
           <a:xfrm>
-            <a:off x="369454" y="2590802"/>
-            <a:ext cx="11820117" cy="1015663"/>
+            <a:off x="544223" y="1924084"/>
+            <a:ext cx="11103554" cy="4031873"/>
           </a:xfrm>
           <a:prstGeom prst="rect">
             <a:avLst/>
@@ -12165,60 +12223,111 @@
           </a:bodyPr>
           <a:lstStyle/>
           <a:p>
-            <a:r>
-              <a:rPr lang="en-US" sz="3000" dirty="0">
-                <a:latin typeface="Helvetica Light" panose="020B0403020202020204" pitchFamily="34" charset="0"/>
-              </a:rPr>
-              <a:t>2. Write </a:t>
-            </a:r>
-            <a:r>
-              <a:rPr lang="en-US" sz="3000">
-                <a:latin typeface="Helvetica Light" panose="020B0403020202020204" pitchFamily="34" charset="0"/>
-              </a:rPr>
-              <a:t>your first</a:t>
-            </a:r>
-            <a:r>
-              <a:rPr lang="en-US" sz="3000" dirty="0">
-                <a:latin typeface="Helvetica Light" panose="020B0403020202020204" pitchFamily="34" charset="0"/>
-              </a:rPr>
-              <a:t>, and simplest possible, python program (follow 	week5_primer.md)</a:t>
-            </a:r>
-          </a:p>
-        </p:txBody>
-      </p:sp>
-      <p:sp>
-        <p:nvSpPr>
-          <p:cNvPr id="4" name="TextBox 3">
-            <a:extLst>
-              <a:ext uri="{FF2B5EF4-FFF2-40B4-BE49-F238E27FC236}">
-                <a16:creationId xmlns:a16="http://schemas.microsoft.com/office/drawing/2014/main" id="{41A4EA31-EF2A-F045-A761-D6ECF013E8E0}"/>
-              </a:ext>
-            </a:extLst>
-          </p:cNvPr>
-          <p:cNvSpPr txBox="1"/>
-          <p:nvPr/>
-        </p:nvSpPr>
-        <p:spPr>
-          <a:xfrm>
-            <a:off x="369454" y="4318247"/>
-            <a:ext cx="11820117" cy="1477328"/>
-          </a:xfrm>
-          <a:prstGeom prst="rect">
-            <a:avLst/>
-          </a:prstGeom>
-          <a:noFill/>
-        </p:spPr>
-        <p:txBody>
-          <a:bodyPr wrap="square" rtlCol="0">
-            <a:spAutoFit/>
-          </a:bodyPr>
-          <a:lstStyle/>
-          <a:p>
-            <a:r>
-              <a:rPr lang="en-US" sz="3000" dirty="0">
-                <a:latin typeface="Helvetica Light" panose="020B0403020202020204" pitchFamily="34" charset="0"/>
-              </a:rPr>
-              <a:t>3. Note: updated versions of book chapters corrected for python 3 	will be available with other weekly materials on GitHub, starting 	with chapter 8.</a:t>
+            <a:pPr marL="514350" indent="-514350">
+              <a:buAutoNum type="arabicPeriod"/>
+            </a:pPr>
+            <a:r>
+              <a:rPr lang="en-US" sz="3200" dirty="0">
+                <a:latin typeface="Helvetica Light" panose="020B0403020202020204" pitchFamily="34" charset="0"/>
+              </a:rPr>
+              <a:t>Go through short week5_primer.md</a:t>
+            </a:r>
+          </a:p>
+          <a:p>
+            <a:pPr marL="514350" indent="-514350">
+              <a:buAutoNum type="arabicPeriod"/>
+            </a:pPr>
+            <a:endParaRPr lang="en-US" sz="3200" dirty="0">
+              <a:latin typeface="Helvetica Light" panose="020B0403020202020204" pitchFamily="34" charset="0"/>
+            </a:endParaRPr>
+          </a:p>
+          <a:p>
+            <a:pPr marL="514350" indent="-514350">
+              <a:buAutoNum type="arabicPeriod"/>
+            </a:pPr>
+            <a:r>
+              <a:rPr lang="en-US" sz="3200" dirty="0">
+                <a:latin typeface="Helvetica Light" panose="020B0403020202020204" pitchFamily="34" charset="0"/>
+              </a:rPr>
+              <a:t>Read Chapter 7, Preview Chapter 8</a:t>
+            </a:r>
+          </a:p>
+          <a:p>
+            <a:pPr marL="514350" indent="-514350">
+              <a:buAutoNum type="arabicPeriod"/>
+            </a:pPr>
+            <a:endParaRPr lang="en-US" sz="3200" dirty="0">
+              <a:latin typeface="Helvetica Light" panose="020B0403020202020204" pitchFamily="34" charset="0"/>
+            </a:endParaRPr>
+          </a:p>
+          <a:p>
+            <a:r>
+              <a:rPr lang="en-US" sz="3200" dirty="0">
+                <a:latin typeface="Helvetica Light" panose="020B0403020202020204" pitchFamily="34" charset="0"/>
+              </a:rPr>
+              <a:t>3. Go through </a:t>
+            </a:r>
+            <a:r>
+              <a:rPr lang="en-US" sz="3200" dirty="0" err="1">
+                <a:solidFill>
+                  <a:srgbClr val="121212"/>
+                </a:solidFill>
+                <a:effectLst/>
+                <a:latin typeface="Menlo" panose="020B0609030804020204" pitchFamily="49" charset="0"/>
+              </a:rPr>
+              <a:t>jupyter_getting_started.md</a:t>
+            </a:r>
+            <a:r>
+              <a:rPr lang="en-US" sz="3200" dirty="0">
+                <a:solidFill>
+                  <a:srgbClr val="121212"/>
+                </a:solidFill>
+                <a:latin typeface="Menlo" panose="020B0609030804020204" pitchFamily="49" charset="0"/>
+              </a:rPr>
+              <a:t> </a:t>
+            </a:r>
+            <a:r>
+              <a:rPr lang="en-US" sz="3200" dirty="0">
+                <a:solidFill>
+                  <a:srgbClr val="121212"/>
+                </a:solidFill>
+                <a:latin typeface="Helvetica Light" panose="020B0403020202020204" pitchFamily="34" charset="0"/>
+              </a:rPr>
+              <a:t>(under </a:t>
+            </a:r>
+            <a:r>
+              <a:rPr lang="en-US" sz="3200" dirty="0" err="1">
+                <a:solidFill>
+                  <a:srgbClr val="121212"/>
+                </a:solidFill>
+                <a:latin typeface="Helvetica Light" panose="020B0403020202020204" pitchFamily="34" charset="0"/>
+              </a:rPr>
+              <a:t>jupyter_start</a:t>
+            </a:r>
+            <a:r>
+              <a:rPr lang="en-US" sz="3200" dirty="0">
+                <a:solidFill>
+                  <a:srgbClr val="121212"/>
+                </a:solidFill>
+                <a:latin typeface="Helvetica Light" panose="020B0403020202020204" pitchFamily="34" charset="0"/>
+              </a:rPr>
+              <a:t>)</a:t>
+            </a:r>
+            <a:endParaRPr lang="en-US" sz="3200" dirty="0">
+              <a:latin typeface="Helvetica Light" panose="020B0403020202020204" pitchFamily="34" charset="0"/>
+            </a:endParaRPr>
+          </a:p>
+          <a:p>
+            <a:endParaRPr lang="en-US" sz="3200" dirty="0">
+              <a:latin typeface="Helvetica Light" panose="020B0403020202020204" pitchFamily="34" charset="0"/>
+            </a:endParaRPr>
+          </a:p>
+          <a:p>
+            <a:r>
+              <a:rPr lang="en-US" sz="3200" dirty="0">
+                <a:latin typeface="Helvetica Light" panose="020B0403020202020204" pitchFamily="34" charset="0"/>
+              </a:rPr>
+              <a:t>4. Converse about independent project ideas if needed</a:t>
             </a:r>
           </a:p>
         </p:txBody>
@@ -12226,7 +12335,7 @@
     </p:spTree>
     <p:extLst>
       <p:ext uri="{BB962C8B-B14F-4D97-AF65-F5344CB8AC3E}">
-        <p14:creationId xmlns:p14="http://schemas.microsoft.com/office/powerpoint/2010/main" val="79706296"/>
+        <p14:creationId xmlns:p14="http://schemas.microsoft.com/office/powerpoint/2010/main" val="299710505"/>
       </p:ext>
     </p:extLst>
   </p:cSld>
@@ -12258,6 +12367,159 @@
           <p:cNvPr id="2" name="TextBox 1">
             <a:extLst>
               <a:ext uri="{FF2B5EF4-FFF2-40B4-BE49-F238E27FC236}">
+                <a16:creationId xmlns:a16="http://schemas.microsoft.com/office/drawing/2014/main" id="{4710A132-F479-7B4D-90DF-92D2042E73B8}"/>
+              </a:ext>
+            </a:extLst>
+          </p:cNvPr>
+          <p:cNvSpPr txBox="1"/>
+          <p:nvPr/>
+        </p:nvSpPr>
+        <p:spPr>
+          <a:xfrm>
+            <a:off x="341745" y="840511"/>
+            <a:ext cx="11600873" cy="1015663"/>
+          </a:xfrm>
+          <a:prstGeom prst="rect">
+            <a:avLst/>
+          </a:prstGeom>
+          <a:noFill/>
+        </p:spPr>
+        <p:txBody>
+          <a:bodyPr wrap="square" rtlCol="0">
+            <a:spAutoFit/>
+          </a:bodyPr>
+          <a:lstStyle/>
+          <a:p>
+            <a:r>
+              <a:rPr lang="en-US" sz="3000" dirty="0">
+                <a:latin typeface="Helvetica Light" panose="020B0403020202020204" pitchFamily="34" charset="0"/>
+              </a:rPr>
+              <a:t>1. Make sure you have python 3 installed (follow 	week5_primer.md)</a:t>
+            </a:r>
+          </a:p>
+        </p:txBody>
+      </p:sp>
+      <p:sp>
+        <p:nvSpPr>
+          <p:cNvPr id="3" name="TextBox 2">
+            <a:extLst>
+              <a:ext uri="{FF2B5EF4-FFF2-40B4-BE49-F238E27FC236}">
+                <a16:creationId xmlns:a16="http://schemas.microsoft.com/office/drawing/2014/main" id="{83DEACCF-7E0D-8A4F-9D6C-B787233F3FA7}"/>
+              </a:ext>
+            </a:extLst>
+          </p:cNvPr>
+          <p:cNvSpPr txBox="1"/>
+          <p:nvPr/>
+        </p:nvSpPr>
+        <p:spPr>
+          <a:xfrm>
+            <a:off x="369454" y="2590802"/>
+            <a:ext cx="11820117" cy="1015663"/>
+          </a:xfrm>
+          <a:prstGeom prst="rect">
+            <a:avLst/>
+          </a:prstGeom>
+          <a:noFill/>
+        </p:spPr>
+        <p:txBody>
+          <a:bodyPr wrap="square" rtlCol="0">
+            <a:spAutoFit/>
+          </a:bodyPr>
+          <a:lstStyle/>
+          <a:p>
+            <a:r>
+              <a:rPr lang="en-US" sz="3000" dirty="0">
+                <a:latin typeface="Helvetica Light" panose="020B0403020202020204" pitchFamily="34" charset="0"/>
+              </a:rPr>
+              <a:t>2. Write </a:t>
+            </a:r>
+            <a:r>
+              <a:rPr lang="en-US" sz="3000">
+                <a:latin typeface="Helvetica Light" panose="020B0403020202020204" pitchFamily="34" charset="0"/>
+              </a:rPr>
+              <a:t>your first</a:t>
+            </a:r>
+            <a:r>
+              <a:rPr lang="en-US" sz="3000" dirty="0">
+                <a:latin typeface="Helvetica Light" panose="020B0403020202020204" pitchFamily="34" charset="0"/>
+              </a:rPr>
+              <a:t>, and simplest possible, python program (follow 	week5_primer.md)</a:t>
+            </a:r>
+          </a:p>
+        </p:txBody>
+      </p:sp>
+      <p:sp>
+        <p:nvSpPr>
+          <p:cNvPr id="4" name="TextBox 3">
+            <a:extLst>
+              <a:ext uri="{FF2B5EF4-FFF2-40B4-BE49-F238E27FC236}">
+                <a16:creationId xmlns:a16="http://schemas.microsoft.com/office/drawing/2014/main" id="{41A4EA31-EF2A-F045-A761-D6ECF013E8E0}"/>
+              </a:ext>
+            </a:extLst>
+          </p:cNvPr>
+          <p:cNvSpPr txBox="1"/>
+          <p:nvPr/>
+        </p:nvSpPr>
+        <p:spPr>
+          <a:xfrm>
+            <a:off x="369454" y="4318247"/>
+            <a:ext cx="11820117" cy="1477328"/>
+          </a:xfrm>
+          <a:prstGeom prst="rect">
+            <a:avLst/>
+          </a:prstGeom>
+          <a:noFill/>
+        </p:spPr>
+        <p:txBody>
+          <a:bodyPr wrap="square" rtlCol="0">
+            <a:spAutoFit/>
+          </a:bodyPr>
+          <a:lstStyle/>
+          <a:p>
+            <a:r>
+              <a:rPr lang="en-US" sz="3000" dirty="0">
+                <a:latin typeface="Helvetica Light" panose="020B0403020202020204" pitchFamily="34" charset="0"/>
+              </a:rPr>
+              <a:t>3. Note: updated versions of book chapters corrected for python 3 	will be available with other weekly materials on GitHub, starting 	with chapter 8.</a:t>
+            </a:r>
+          </a:p>
+        </p:txBody>
+      </p:sp>
+    </p:spTree>
+    <p:extLst>
+      <p:ext uri="{BB962C8B-B14F-4D97-AF65-F5344CB8AC3E}">
+        <p14:creationId xmlns:p14="http://schemas.microsoft.com/office/powerpoint/2010/main" val="79706296"/>
+      </p:ext>
+    </p:extLst>
+  </p:cSld>
+  <p:clrMapOvr>
+    <a:masterClrMapping/>
+  </p:clrMapOvr>
+</p:sld>
+</file>
+
+<file path=ppt/slides/slide25.xml><?xml version="1.0" encoding="utf-8"?>
+<p:sld xmlns:a="http://schemas.openxmlformats.org/drawingml/2006/main" xmlns:r="http://schemas.openxmlformats.org/officeDocument/2006/relationships" xmlns:p="http://schemas.openxmlformats.org/presentationml/2006/main">
+  <p:cSld>
+    <p:spTree>
+      <p:nvGrpSpPr>
+        <p:cNvPr id="1" name=""/>
+        <p:cNvGrpSpPr/>
+        <p:nvPr/>
+      </p:nvGrpSpPr>
+      <p:grpSpPr>
+        <a:xfrm>
+          <a:off x="0" y="0"/>
+          <a:ext cx="0" cy="0"/>
+          <a:chOff x="0" y="0"/>
+          <a:chExt cx="0" cy="0"/>
+        </a:xfrm>
+      </p:grpSpPr>
+      <p:sp>
+        <p:nvSpPr>
+          <p:cNvPr id="2" name="TextBox 1">
+            <a:extLst>
+              <a:ext uri="{FF2B5EF4-FFF2-40B4-BE49-F238E27FC236}">
                 <a16:creationId xmlns:a16="http://schemas.microsoft.com/office/drawing/2014/main" id="{34015567-784C-3746-9A0D-D952302611BC}"/>
               </a:ext>
             </a:extLst>
@@ -12528,7 +12790,7 @@
 </p:sld>
 </file>
 
-<file path=ppt/slides/slide25.xml><?xml version="1.0" encoding="utf-8"?>
+<file path=ppt/slides/slide26.xml><?xml version="1.0" encoding="utf-8"?>
 <p:sld xmlns:a="http://schemas.openxmlformats.org/drawingml/2006/main" xmlns:r="http://schemas.openxmlformats.org/officeDocument/2006/relationships" xmlns:p="http://schemas.openxmlformats.org/presentationml/2006/main">
   <p:cSld>
     <p:spTree>

--- a/week5/week5_chap7_python_first_steps.pptx
+++ b/week5/week5_chap7_python_first_steps.pptx
@@ -6406,7 +6406,7 @@
         </p:nvSpPr>
         <p:spPr>
           <a:xfrm>
-            <a:off x="898216" y="5480839"/>
+            <a:off x="898215" y="5525297"/>
             <a:ext cx="8836504" cy="830997"/>
           </a:xfrm>
           <a:prstGeom prst="rect">
@@ -6429,7 +6429,7 @@
               <a:rPr lang="en-US" sz="2400" b="1" dirty="0">
                 <a:latin typeface="Helvetica Light" panose="020B0403020202020204" pitchFamily="34" charset="0"/>
               </a:rPr>
-              <a:t>Useful, and often used: can ‘loop’ through arrays rapidly, performing the same set of actions on each element</a:t>
+              <a:t>Useful, and often used: can ‘loop’ through lists rapidly, performing the same set of actions on each element</a:t>
             </a:r>
             <a:endParaRPr lang="en-US" sz="2200" b="1" dirty="0">
               <a:latin typeface="Courier New" panose="02070309020205020404" pitchFamily="49" charset="0"/>
@@ -11093,8 +11093,8 @@
         </p:nvSpPr>
         <p:spPr>
           <a:xfrm>
-            <a:off x="772998" y="1923068"/>
-            <a:ext cx="10796545" cy="461665"/>
+            <a:off x="772999" y="1923068"/>
+            <a:ext cx="10630726" cy="892552"/>
           </a:xfrm>
           <a:prstGeom prst="rect">
             <a:avLst/>
@@ -11102,37 +11102,37 @@
           <a:noFill/>
         </p:spPr>
         <p:txBody>
-          <a:bodyPr wrap="none" rtlCol="0">
+          <a:bodyPr wrap="square" rtlCol="0">
             <a:spAutoFit/>
           </a:bodyPr>
           <a:lstStyle/>
           <a:p>
             <a:r>
-              <a:rPr lang="en-US" sz="2400" dirty="0">
+              <a:rPr lang="en-US" sz="2600" dirty="0">
                 <a:latin typeface="Helvetica Light" panose="020B0403020202020204" pitchFamily="34" charset="0"/>
               </a:rPr>
               <a:t>- Nearly always, your programs will </a:t>
             </a:r>
             <a:r>
-              <a:rPr lang="en-US" sz="2400" b="1" dirty="0">
+              <a:rPr lang="en-US" sz="2600" b="1" dirty="0">
                 <a:latin typeface="Helvetica Light" panose="020B0403020202020204" pitchFamily="34" charset="0"/>
               </a:rPr>
               <a:t>process</a:t>
             </a:r>
             <a:r>
-              <a:rPr lang="en-US" sz="2400" dirty="0">
+              <a:rPr lang="en-US" sz="2600" dirty="0">
                 <a:latin typeface="Helvetica Light" panose="020B0403020202020204" pitchFamily="34" charset="0"/>
               </a:rPr>
               <a:t> information </a:t>
             </a:r>
             <a:r>
-              <a:rPr lang="en-US" sz="2400" b="1" dirty="0">
+              <a:rPr lang="en-US" sz="2600" b="1" dirty="0">
                 <a:latin typeface="Helvetica Light" panose="020B0403020202020204" pitchFamily="34" charset="0"/>
               </a:rPr>
               <a:t>from</a:t>
             </a:r>
             <a:r>
-              <a:rPr lang="en-US" sz="2400" dirty="0">
+              <a:rPr lang="en-US" sz="2600" dirty="0">
                 <a:latin typeface="Helvetica Light" panose="020B0403020202020204" pitchFamily="34" charset="0"/>
               </a:rPr>
               <a:t> files you specify</a:t>
@@ -11154,8 +11154,8 @@
         </p:nvSpPr>
         <p:spPr>
           <a:xfrm>
-            <a:off x="772998" y="3429000"/>
-            <a:ext cx="9975808" cy="461665"/>
+            <a:off x="772999" y="3429000"/>
+            <a:ext cx="9802624" cy="892552"/>
           </a:xfrm>
           <a:prstGeom prst="rect">
             <a:avLst/>
@@ -11163,37 +11163,37 @@
           <a:noFill/>
         </p:spPr>
         <p:txBody>
-          <a:bodyPr wrap="none" rtlCol="0">
+          <a:bodyPr wrap="square" rtlCol="0">
             <a:spAutoFit/>
           </a:bodyPr>
           <a:lstStyle/>
           <a:p>
             <a:r>
-              <a:rPr lang="en-US" sz="2400" dirty="0">
+              <a:rPr lang="en-US" sz="2600" dirty="0">
                 <a:latin typeface="Helvetica Light" panose="020B0403020202020204" pitchFamily="34" charset="0"/>
               </a:rPr>
               <a:t>- Nearly always, your programs will </a:t>
             </a:r>
             <a:r>
-              <a:rPr lang="en-US" sz="2400" b="1" dirty="0">
+              <a:rPr lang="en-US" sz="2600" b="1" dirty="0">
                 <a:latin typeface="Helvetica Light" panose="020B0403020202020204" pitchFamily="34" charset="0"/>
               </a:rPr>
               <a:t>write</a:t>
             </a:r>
             <a:r>
-              <a:rPr lang="en-US" sz="2400" dirty="0">
+              <a:rPr lang="en-US" sz="2600" dirty="0">
                 <a:latin typeface="Helvetica Light" panose="020B0403020202020204" pitchFamily="34" charset="0"/>
               </a:rPr>
               <a:t> information </a:t>
             </a:r>
             <a:r>
-              <a:rPr lang="en-US" sz="2400" b="1" dirty="0">
+              <a:rPr lang="en-US" sz="2600" b="1" dirty="0">
                 <a:latin typeface="Helvetica Light" panose="020B0403020202020204" pitchFamily="34" charset="0"/>
               </a:rPr>
               <a:t>to</a:t>
             </a:r>
             <a:r>
-              <a:rPr lang="en-US" sz="2400" dirty="0">
+              <a:rPr lang="en-US" sz="2600" dirty="0">
                 <a:latin typeface="Helvetica Light" panose="020B0403020202020204" pitchFamily="34" charset="0"/>
               </a:rPr>
               <a:t> files you specify</a:t>
@@ -11216,7 +11216,7 @@
         <p:spPr>
           <a:xfrm>
             <a:off x="772998" y="4657125"/>
-            <a:ext cx="11203215" cy="830997"/>
+            <a:ext cx="10135739" cy="892552"/>
           </a:xfrm>
           <a:prstGeom prst="rect">
             <a:avLst/>
@@ -11230,7 +11230,7 @@
           <a:lstStyle/>
           <a:p>
             <a:r>
-              <a:rPr lang="en-US" sz="2400" dirty="0">
+              <a:rPr lang="en-US" sz="2600" dirty="0">
                 <a:latin typeface="Helvetica Light" panose="020B0403020202020204" pitchFamily="34" charset="0"/>
               </a:rPr>
               <a:t>- Sometimes this will involve one file at a time; often it will involve many (which can be just as easy) </a:t>
@@ -12463,7 +12463,7 @@
         <p:spPr>
           <a:xfrm>
             <a:off x="369454" y="4318247"/>
-            <a:ext cx="11820117" cy="1477328"/>
+            <a:ext cx="11820117" cy="1015663"/>
           </a:xfrm>
           <a:prstGeom prst="rect">
             <a:avLst/>
@@ -12480,8 +12480,23 @@
               <a:rPr lang="en-US" sz="3000" dirty="0">
                 <a:latin typeface="Helvetica Light" panose="020B0403020202020204" pitchFamily="34" charset="0"/>
               </a:rPr>
-              <a:t>3. Note: updated versions of book chapters corrected for python 3 	will be available with other weekly materials on GitHub, starting 	with chapter 8.</a:t>
-            </a:r>
+              <a:t>3. Be sure you have Anaconda Navigator installed, and that you are have tested out </a:t>
+            </a:r>
+            <a:r>
+              <a:rPr lang="en-US" sz="3000" dirty="0" err="1">
+                <a:latin typeface="Helvetica Light" panose="020B0403020202020204" pitchFamily="34" charset="0"/>
+              </a:rPr>
+              <a:t>Jupyter</a:t>
+            </a:r>
+            <a:r>
+              <a:rPr lang="en-US" sz="3000">
+                <a:latin typeface="Helvetica Light" panose="020B0403020202020204" pitchFamily="34" charset="0"/>
+              </a:rPr>
+              <a:t> notebooks.</a:t>
+            </a:r>
+            <a:endParaRPr lang="en-US" sz="3000" dirty="0">
+              <a:latin typeface="Helvetica Light" panose="020B0403020202020204" pitchFamily="34" charset="0"/>
+            </a:endParaRPr>
           </a:p>
         </p:txBody>
       </p:sp>
